--- a/output/wordlabs-flect-3day.pptx
+++ b/output/wordlabs-flect-3day.pptx
@@ -7860,7 +7860,7 @@
                 <a:ea typeface="Calibri" pitchFamily="34" charset="-122"/>
                 <a:cs typeface="Calibri" pitchFamily="34" charset="-120"/>
               </a:rPr>
-              <a:t>away from, down</a:t>
+              <a:t>away, off, down</a:t>
             </a:r>
             <a:endParaRPr lang="en-US" sz="850" dirty="0"/>
           </a:p>
@@ -8845,7 +8845,7 @@
                 <a:ea typeface="Calibri" pitchFamily="34" charset="-122"/>
                 <a:cs typeface="Calibri" pitchFamily="34" charset="-120"/>
               </a:rPr>
-              <a:t>away from, down</a:t>
+              <a:t>away, off, down</a:t>
             </a:r>
             <a:endParaRPr lang="en-US" sz="850" dirty="0"/>
           </a:p>
@@ -9962,7 +9962,7 @@
                 <a:ea typeface="Calibri" pitchFamily="34" charset="-122"/>
                 <a:cs typeface="Calibri" pitchFamily="34" charset="-120"/>
               </a:rPr>
-              <a:t>away from, down</a:t>
+              <a:t>away, off, down</a:t>
             </a:r>
             <a:endParaRPr lang="en-US" sz="850" dirty="0"/>
           </a:p>
@@ -16349,7 +16349,7 @@
                 <a:ea typeface="Trebuchet MS" pitchFamily="34" charset="-122"/>
                 <a:cs typeface="Trebuchet MS" pitchFamily="34" charset="-120"/>
               </a:rPr>
-              <a:t>1</a:t>
+              <a:t>2</a:t>
             </a:r>
             <a:pPr algn="ctr" indent="0" marL="0">
               <a:buNone/>
@@ -16363,7 +16363,7 @@
                 <a:ea typeface="Trebuchet MS" pitchFamily="34" charset="-122"/>
                 <a:cs typeface="Trebuchet MS" pitchFamily="34" charset="-120"/>
               </a:rPr>
-              <a:t>  punctuation mark</a:t>
+              <a:t>  punctuation marks</a:t>
             </a:r>
             <a:endParaRPr lang="en-US" sz="2800" dirty="0"/>
           </a:p>
@@ -16767,7 +16767,7 @@
                 <a:ea typeface="Calibri" pitchFamily="34" charset="-122"/>
                 <a:cs typeface="Calibri" pitchFamily="34" charset="-120"/>
               </a:rPr>
-              <a:t>During her </a:t>
+              <a:t>Her </a:t>
             </a:r>
             <a:pPr algn="l" indent="0" marL="0">
               <a:buNone/>
@@ -16798,7 +16798,7 @@
                 <a:ea typeface="Calibri" pitchFamily="34" charset="-122"/>
                 <a:cs typeface="Calibri" pitchFamily="34" charset="-120"/>
               </a:rPr>
-              <a:t>, she began </a:t>
+              <a:t> in the puddle was clear, but the </a:t>
             </a:r>
             <a:pPr algn="l" indent="0" marL="0">
               <a:buNone/>
@@ -16815,7 +16815,7 @@
                 <a:ea typeface="Calibri" pitchFamily="34" charset="-122"/>
                 <a:cs typeface="Calibri" pitchFamily="34" charset="-120"/>
               </a:rPr>
-              <a:t>reflecting</a:t>
+              <a:t>inflection</a:t>
             </a:r>
             <a:pPr algn="l" indent="0" marL="0">
               <a:buNone/>
@@ -16829,7 +16829,7 @@
                 <a:ea typeface="Calibri" pitchFamily="34" charset="-122"/>
                 <a:cs typeface="Calibri" pitchFamily="34" charset="-120"/>
               </a:rPr>
-              <a:t> on how the pond could </a:t>
+              <a:t> in her voice showed she was </a:t>
             </a:r>
             <a:pPr algn="l" indent="0" marL="0">
               <a:buNone/>
@@ -16846,7 +16846,7 @@
                 <a:ea typeface="Calibri" pitchFamily="34" charset="-122"/>
                 <a:cs typeface="Calibri" pitchFamily="34" charset="-120"/>
               </a:rPr>
-              <a:t>reflect</a:t>
+              <a:t>reflective</a:t>
             </a:r>
             <a:pPr algn="l" indent="0" marL="0">
               <a:buNone/>
@@ -16860,7 +16860,7 @@
                 <a:ea typeface="Calibri" pitchFamily="34" charset="-122"/>
                 <a:cs typeface="Calibri" pitchFamily="34" charset="-120"/>
               </a:rPr>
-              <a:t> every cloud in the sky above.</a:t>
+              <a:t> and deep in thought.</a:t>
             </a:r>
             <a:endParaRPr lang="en-US" sz="1800" dirty="0"/>
           </a:p>
@@ -17143,7 +17143,7 @@
                 <a:ea typeface="Trebuchet MS" pitchFamily="34" charset="-122"/>
                 <a:cs typeface="Trebuchet MS" pitchFamily="34" charset="-120"/>
               </a:rPr>
-              <a:t>reflecting</a:t>
+              <a:t>inflection</a:t>
             </a:r>
             <a:endParaRPr lang="en-US" sz="1400" dirty="0"/>
           </a:p>
@@ -17271,7 +17271,7 @@
                 <a:ea typeface="Trebuchet MS" pitchFamily="34" charset="-122"/>
                 <a:cs typeface="Trebuchet MS" pitchFamily="34" charset="-120"/>
               </a:rPr>
-              <a:t>reflect</a:t>
+              <a:t>reflective</a:t>
             </a:r>
             <a:endParaRPr lang="en-US" sz="1400" dirty="0"/>
           </a:p>
@@ -18970,7 +18970,7 @@
                 <a:ea typeface="Calibri" pitchFamily="34" charset="-122"/>
                 <a:cs typeface="Calibri" pitchFamily="34" charset="-120"/>
               </a:rPr>
-              <a:t>state or act of</a:t>
+              <a:t>act or result of</a:t>
             </a:r>
             <a:endParaRPr lang="en-US" sz="850" dirty="0"/>
           </a:p>
@@ -18978,7 +18978,46 @@
       </p:sp>
       <p:sp>
         <p:nvSpPr>
-          <p:cNvPr id="25" name="Shape 23"/>
+          <p:cNvPr id="25" name="Text 23"/>
+          <p:cNvSpPr/>
+          <p:nvPr/>
+        </p:nvSpPr>
+        <p:spPr>
+          <a:xfrm>
+            <a:off x="6519672" y="2752344"/>
+            <a:ext cx="1828800" cy="182880"/>
+          </a:xfrm>
+          <a:prstGeom prst="rect">
+            <a:avLst/>
+          </a:prstGeom>
+          <a:noFill/>
+          <a:ln/>
+        </p:spPr>
+        <p:txBody>
+          <a:bodyPr wrap="square" lIns="0" tIns="0" rIns="0" bIns="0" rtlCol="0" anchor="t"/>
+          <a:lstStyle/>
+          <a:p>
+            <a:pPr algn="ctr" indent="0" marL="0">
+              <a:buNone/>
+            </a:pPr>
+            <a:r>
+              <a:rPr lang="en-US" sz="700" i="1" dirty="0">
+                <a:solidFill>
+                  <a:srgbClr val="94A3B8"/>
+                </a:solidFill>
+                <a:latin typeface="Calibri" pitchFamily="34" charset="0"/>
+                <a:ea typeface="Calibri" pitchFamily="34" charset="-122"/>
+                <a:cs typeface="Calibri" pitchFamily="34" charset="-120"/>
+              </a:rPr>
+              <a:t>'t' added before '-ion' suffix</a:t>
+            </a:r>
+            <a:endParaRPr lang="en-US" sz="700" dirty="0"/>
+          </a:p>
+        </p:txBody>
+      </p:sp>
+      <p:sp>
+        <p:nvSpPr>
+          <p:cNvPr id="26" name="Shape 24"/>
           <p:cNvSpPr/>
           <p:nvPr/>
         </p:nvSpPr>
@@ -19005,7 +19044,7 @@
       </p:sp>
       <p:sp>
         <p:nvSpPr>
-          <p:cNvPr id="26" name="Text 24"/>
+          <p:cNvPr id="27" name="Text 25"/>
           <p:cNvSpPr/>
           <p:nvPr/>
         </p:nvSpPr>
@@ -19044,7 +19083,7 @@
       </p:sp>
       <p:sp>
         <p:nvSpPr>
-          <p:cNvPr id="27" name="Shape 25"/>
+          <p:cNvPr id="28" name="Shape 26"/>
           <p:cNvSpPr/>
           <p:nvPr/>
         </p:nvSpPr>
@@ -19071,7 +19110,7 @@
       </p:sp>
       <p:sp>
         <p:nvSpPr>
-          <p:cNvPr id="28" name="Text 26"/>
+          <p:cNvPr id="29" name="Text 27"/>
           <p:cNvSpPr/>
           <p:nvPr/>
         </p:nvSpPr>
@@ -19110,7 +19149,7 @@
       </p:sp>
       <p:sp>
         <p:nvSpPr>
-          <p:cNvPr id="29" name="Shape 27"/>
+          <p:cNvPr id="30" name="Shape 28"/>
           <p:cNvSpPr/>
           <p:nvPr/>
         </p:nvSpPr>
@@ -19137,7 +19176,7 @@
       </p:sp>
       <p:sp>
         <p:nvSpPr>
-          <p:cNvPr id="30" name="Text 28"/>
+          <p:cNvPr id="31" name="Text 29"/>
           <p:cNvSpPr/>
           <p:nvPr/>
         </p:nvSpPr>
@@ -19176,7 +19215,7 @@
       </p:sp>
       <p:sp>
         <p:nvSpPr>
-          <p:cNvPr id="31" name="Shape 29"/>
+          <p:cNvPr id="32" name="Shape 30"/>
           <p:cNvSpPr/>
           <p:nvPr/>
         </p:nvSpPr>
@@ -19203,7 +19242,7 @@
       </p:sp>
       <p:sp>
         <p:nvSpPr>
-          <p:cNvPr id="32" name="Text 30"/>
+          <p:cNvPr id="33" name="Text 31"/>
           <p:cNvSpPr/>
           <p:nvPr/>
         </p:nvSpPr>
@@ -20067,7 +20106,7 @@
                 <a:ea typeface="Calibri" pitchFamily="34" charset="-122"/>
                 <a:cs typeface="Calibri" pitchFamily="34" charset="-120"/>
               </a:rPr>
-              <a:t>state or act of</a:t>
+              <a:t>act or result of</a:t>
             </a:r>
             <a:endParaRPr lang="en-US" sz="850" dirty="0"/>
           </a:p>
@@ -20075,7 +20114,46 @@
       </p:sp>
       <p:sp>
         <p:nvSpPr>
-          <p:cNvPr id="25" name="Shape 23"/>
+          <p:cNvPr id="25" name="Text 23"/>
+          <p:cNvSpPr/>
+          <p:nvPr/>
+        </p:nvSpPr>
+        <p:spPr>
+          <a:xfrm>
+            <a:off x="6519672" y="2752344"/>
+            <a:ext cx="1828800" cy="182880"/>
+          </a:xfrm>
+          <a:prstGeom prst="rect">
+            <a:avLst/>
+          </a:prstGeom>
+          <a:noFill/>
+          <a:ln/>
+        </p:spPr>
+        <p:txBody>
+          <a:bodyPr wrap="square" lIns="0" tIns="0" rIns="0" bIns="0" rtlCol="0" anchor="t"/>
+          <a:lstStyle/>
+          <a:p>
+            <a:pPr algn="ctr" indent="0" marL="0">
+              <a:buNone/>
+            </a:pPr>
+            <a:r>
+              <a:rPr lang="en-US" sz="700" i="1" dirty="0">
+                <a:solidFill>
+                  <a:srgbClr val="94A3B8"/>
+                </a:solidFill>
+                <a:latin typeface="Calibri" pitchFamily="34" charset="0"/>
+                <a:ea typeface="Calibri" pitchFamily="34" charset="-122"/>
+                <a:cs typeface="Calibri" pitchFamily="34" charset="-120"/>
+              </a:rPr>
+              <a:t>'t' added before '-ion' suffix</a:t>
+            </a:r>
+            <a:endParaRPr lang="en-US" sz="700" dirty="0"/>
+          </a:p>
+        </p:txBody>
+      </p:sp>
+      <p:sp>
+        <p:nvSpPr>
+          <p:cNvPr id="26" name="Shape 24"/>
           <p:cNvSpPr/>
           <p:nvPr/>
         </p:nvSpPr>
@@ -20102,7 +20180,7 @@
       </p:sp>
       <p:sp>
         <p:nvSpPr>
-          <p:cNvPr id="26" name="Text 24"/>
+          <p:cNvPr id="27" name="Text 25"/>
           <p:cNvSpPr/>
           <p:nvPr/>
         </p:nvSpPr>
@@ -20141,7 +20219,7 @@
       </p:sp>
       <p:sp>
         <p:nvSpPr>
-          <p:cNvPr id="27" name="Shape 25"/>
+          <p:cNvPr id="28" name="Shape 26"/>
           <p:cNvSpPr/>
           <p:nvPr/>
         </p:nvSpPr>
@@ -20168,7 +20246,7 @@
       </p:sp>
       <p:sp>
         <p:nvSpPr>
-          <p:cNvPr id="28" name="Shape 26"/>
+          <p:cNvPr id="29" name="Shape 27"/>
           <p:cNvSpPr/>
           <p:nvPr/>
         </p:nvSpPr>
@@ -20195,7 +20273,7 @@
       </p:sp>
       <p:sp>
         <p:nvSpPr>
-          <p:cNvPr id="29" name="Text 27"/>
+          <p:cNvPr id="30" name="Text 28"/>
           <p:cNvSpPr/>
           <p:nvPr/>
         </p:nvSpPr>
@@ -20234,7 +20312,7 @@
       </p:sp>
       <p:sp>
         <p:nvSpPr>
-          <p:cNvPr id="30" name="Text 28"/>
+          <p:cNvPr id="31" name="Text 29"/>
           <p:cNvSpPr/>
           <p:nvPr/>
         </p:nvSpPr>
@@ -20273,7 +20351,7 @@
       </p:sp>
       <p:sp>
         <p:nvSpPr>
-          <p:cNvPr id="31" name="Shape 29"/>
+          <p:cNvPr id="32" name="Shape 30"/>
           <p:cNvSpPr/>
           <p:nvPr/>
         </p:nvSpPr>
@@ -20300,7 +20378,7 @@
       </p:sp>
       <p:sp>
         <p:nvSpPr>
-          <p:cNvPr id="32" name="Text 30"/>
+          <p:cNvPr id="33" name="Text 31"/>
           <p:cNvSpPr/>
           <p:nvPr/>
         </p:nvSpPr>
@@ -20339,7 +20417,7 @@
       </p:sp>
       <p:sp>
         <p:nvSpPr>
-          <p:cNvPr id="33" name="Text 31"/>
+          <p:cNvPr id="34" name="Text 32"/>
           <p:cNvSpPr/>
           <p:nvPr/>
         </p:nvSpPr>
@@ -20378,7 +20456,7 @@
       </p:sp>
       <p:sp>
         <p:nvSpPr>
-          <p:cNvPr id="34" name="Shape 32"/>
+          <p:cNvPr id="35" name="Shape 33"/>
           <p:cNvSpPr/>
           <p:nvPr/>
         </p:nvSpPr>
@@ -20405,7 +20483,7 @@
       </p:sp>
       <p:sp>
         <p:nvSpPr>
-          <p:cNvPr id="35" name="Text 33"/>
+          <p:cNvPr id="36" name="Text 34"/>
           <p:cNvSpPr/>
           <p:nvPr/>
         </p:nvSpPr>
@@ -20444,7 +20522,7 @@
       </p:sp>
       <p:sp>
         <p:nvSpPr>
-          <p:cNvPr id="36" name="Shape 34"/>
+          <p:cNvPr id="37" name="Shape 35"/>
           <p:cNvSpPr/>
           <p:nvPr/>
         </p:nvSpPr>
@@ -20471,7 +20549,7 @@
       </p:sp>
       <p:sp>
         <p:nvSpPr>
-          <p:cNvPr id="37" name="Text 35"/>
+          <p:cNvPr id="38" name="Text 36"/>
           <p:cNvSpPr/>
           <p:nvPr/>
         </p:nvSpPr>
@@ -20510,7 +20588,7 @@
       </p:sp>
       <p:sp>
         <p:nvSpPr>
-          <p:cNvPr id="38" name="Shape 36"/>
+          <p:cNvPr id="39" name="Shape 37"/>
           <p:cNvSpPr/>
           <p:nvPr/>
         </p:nvSpPr>
@@ -20537,7 +20615,7 @@
       </p:sp>
       <p:sp>
         <p:nvSpPr>
-          <p:cNvPr id="39" name="Text 37"/>
+          <p:cNvPr id="40" name="Text 38"/>
           <p:cNvSpPr/>
           <p:nvPr/>
         </p:nvSpPr>
@@ -21401,7 +21479,7 @@
                 <a:ea typeface="Calibri" pitchFamily="34" charset="-122"/>
                 <a:cs typeface="Calibri" pitchFamily="34" charset="-120"/>
               </a:rPr>
-              <a:t>state or act of</a:t>
+              <a:t>act or result of</a:t>
             </a:r>
             <a:endParaRPr lang="en-US" sz="850" dirty="0"/>
           </a:p>
@@ -21409,7 +21487,46 @@
       </p:sp>
       <p:sp>
         <p:nvSpPr>
-          <p:cNvPr id="25" name="Shape 23"/>
+          <p:cNvPr id="25" name="Text 23"/>
+          <p:cNvSpPr/>
+          <p:nvPr/>
+        </p:nvSpPr>
+        <p:spPr>
+          <a:xfrm>
+            <a:off x="6519672" y="2752344"/>
+            <a:ext cx="1828800" cy="182880"/>
+          </a:xfrm>
+          <a:prstGeom prst="rect">
+            <a:avLst/>
+          </a:prstGeom>
+          <a:noFill/>
+          <a:ln/>
+        </p:spPr>
+        <p:txBody>
+          <a:bodyPr wrap="square" lIns="0" tIns="0" rIns="0" bIns="0" rtlCol="0" anchor="t"/>
+          <a:lstStyle/>
+          <a:p>
+            <a:pPr algn="ctr" indent="0" marL="0">
+              <a:buNone/>
+            </a:pPr>
+            <a:r>
+              <a:rPr lang="en-US" sz="700" i="1" dirty="0">
+                <a:solidFill>
+                  <a:srgbClr val="94A3B8"/>
+                </a:solidFill>
+                <a:latin typeface="Calibri" pitchFamily="34" charset="0"/>
+                <a:ea typeface="Calibri" pitchFamily="34" charset="-122"/>
+                <a:cs typeface="Calibri" pitchFamily="34" charset="-120"/>
+              </a:rPr>
+              <a:t>'t' added before '-ion' suffix</a:t>
+            </a:r>
+            <a:endParaRPr lang="en-US" sz="700" dirty="0"/>
+          </a:p>
+        </p:txBody>
+      </p:sp>
+      <p:sp>
+        <p:nvSpPr>
+          <p:cNvPr id="26" name="Shape 24"/>
           <p:cNvSpPr/>
           <p:nvPr/>
         </p:nvSpPr>
@@ -21436,7 +21553,7 @@
       </p:sp>
       <p:sp>
         <p:nvSpPr>
-          <p:cNvPr id="26" name="Text 24"/>
+          <p:cNvPr id="27" name="Text 25"/>
           <p:cNvSpPr/>
           <p:nvPr/>
         </p:nvSpPr>
@@ -21475,7 +21592,7 @@
       </p:sp>
       <p:sp>
         <p:nvSpPr>
-          <p:cNvPr id="27" name="Shape 25"/>
+          <p:cNvPr id="28" name="Shape 26"/>
           <p:cNvSpPr/>
           <p:nvPr/>
         </p:nvSpPr>
@@ -21502,7 +21619,7 @@
       </p:sp>
       <p:sp>
         <p:nvSpPr>
-          <p:cNvPr id="28" name="Shape 26"/>
+          <p:cNvPr id="29" name="Shape 27"/>
           <p:cNvSpPr/>
           <p:nvPr/>
         </p:nvSpPr>
@@ -21529,7 +21646,7 @@
       </p:sp>
       <p:sp>
         <p:nvSpPr>
-          <p:cNvPr id="29" name="Text 27"/>
+          <p:cNvPr id="30" name="Text 28"/>
           <p:cNvSpPr/>
           <p:nvPr/>
         </p:nvSpPr>
@@ -21568,7 +21685,7 @@
       </p:sp>
       <p:sp>
         <p:nvSpPr>
-          <p:cNvPr id="30" name="Text 28"/>
+          <p:cNvPr id="31" name="Text 29"/>
           <p:cNvSpPr/>
           <p:nvPr/>
         </p:nvSpPr>
@@ -21607,7 +21724,7 @@
       </p:sp>
       <p:sp>
         <p:nvSpPr>
-          <p:cNvPr id="31" name="Shape 29"/>
+          <p:cNvPr id="32" name="Shape 30"/>
           <p:cNvSpPr/>
           <p:nvPr/>
         </p:nvSpPr>
@@ -21634,7 +21751,7 @@
       </p:sp>
       <p:sp>
         <p:nvSpPr>
-          <p:cNvPr id="32" name="Text 30"/>
+          <p:cNvPr id="33" name="Text 31"/>
           <p:cNvSpPr/>
           <p:nvPr/>
         </p:nvSpPr>
@@ -21673,7 +21790,7 @@
       </p:sp>
       <p:sp>
         <p:nvSpPr>
-          <p:cNvPr id="33" name="Text 31"/>
+          <p:cNvPr id="34" name="Text 32"/>
           <p:cNvSpPr/>
           <p:nvPr/>
         </p:nvSpPr>
@@ -21712,7 +21829,7 @@
       </p:sp>
       <p:sp>
         <p:nvSpPr>
-          <p:cNvPr id="34" name="Shape 32"/>
+          <p:cNvPr id="35" name="Shape 33"/>
           <p:cNvSpPr/>
           <p:nvPr/>
         </p:nvSpPr>
@@ -21739,7 +21856,7 @@
       </p:sp>
       <p:sp>
         <p:nvSpPr>
-          <p:cNvPr id="35" name="Text 33"/>
+          <p:cNvPr id="36" name="Text 34"/>
           <p:cNvSpPr/>
           <p:nvPr/>
         </p:nvSpPr>
@@ -21778,7 +21895,7 @@
       </p:sp>
       <p:sp>
         <p:nvSpPr>
-          <p:cNvPr id="36" name="Shape 34"/>
+          <p:cNvPr id="37" name="Shape 35"/>
           <p:cNvSpPr/>
           <p:nvPr/>
         </p:nvSpPr>
@@ -21805,7 +21922,7 @@
       </p:sp>
       <p:sp>
         <p:nvSpPr>
-          <p:cNvPr id="37" name="Text 35"/>
+          <p:cNvPr id="38" name="Text 36"/>
           <p:cNvSpPr/>
           <p:nvPr/>
         </p:nvSpPr>
@@ -21844,7 +21961,7 @@
       </p:sp>
       <p:sp>
         <p:nvSpPr>
-          <p:cNvPr id="38" name="Shape 36"/>
+          <p:cNvPr id="39" name="Shape 37"/>
           <p:cNvSpPr/>
           <p:nvPr/>
         </p:nvSpPr>
@@ -21871,7 +21988,7 @@
       </p:sp>
       <p:sp>
         <p:nvSpPr>
-          <p:cNvPr id="39" name="Shape 37"/>
+          <p:cNvPr id="40" name="Shape 38"/>
           <p:cNvSpPr/>
           <p:nvPr/>
         </p:nvSpPr>
@@ -21898,7 +22015,7 @@
       </p:sp>
       <p:sp>
         <p:nvSpPr>
-          <p:cNvPr id="40" name="Text 38"/>
+          <p:cNvPr id="41" name="Text 39"/>
           <p:cNvSpPr/>
           <p:nvPr/>
         </p:nvSpPr>
@@ -21937,7 +22054,7 @@
       </p:sp>
       <p:sp>
         <p:nvSpPr>
-          <p:cNvPr id="41" name="Shape 39"/>
+          <p:cNvPr id="42" name="Shape 40"/>
           <p:cNvSpPr/>
           <p:nvPr/>
         </p:nvSpPr>
@@ -21964,7 +22081,7 @@
       </p:sp>
       <p:sp>
         <p:nvSpPr>
-          <p:cNvPr id="42" name="Text 40"/>
+          <p:cNvPr id="43" name="Text 41"/>
           <p:cNvSpPr/>
           <p:nvPr/>
         </p:nvSpPr>
@@ -22003,7 +22120,7 @@
       </p:sp>
       <p:sp>
         <p:nvSpPr>
-          <p:cNvPr id="43" name="Shape 41"/>
+          <p:cNvPr id="44" name="Shape 42"/>
           <p:cNvSpPr/>
           <p:nvPr/>
         </p:nvSpPr>
@@ -22030,7 +22147,7 @@
       </p:sp>
       <p:sp>
         <p:nvSpPr>
-          <p:cNvPr id="44" name="Text 42"/>
+          <p:cNvPr id="45" name="Text 43"/>
           <p:cNvSpPr/>
           <p:nvPr/>
         </p:nvSpPr>
@@ -22069,7 +22186,7 @@
       </p:sp>
       <p:sp>
         <p:nvSpPr>
-          <p:cNvPr id="45" name="Shape 43"/>
+          <p:cNvPr id="46" name="Shape 44"/>
           <p:cNvSpPr/>
           <p:nvPr/>
         </p:nvSpPr>
@@ -22096,7 +22213,7 @@
       </p:sp>
       <p:sp>
         <p:nvSpPr>
-          <p:cNvPr id="46" name="Text 44"/>
+          <p:cNvPr id="47" name="Text 45"/>
           <p:cNvSpPr/>
           <p:nvPr/>
         </p:nvSpPr>
@@ -22135,7 +22252,7 @@
       </p:sp>
       <p:sp>
         <p:nvSpPr>
-          <p:cNvPr id="47" name="Shape 45"/>
+          <p:cNvPr id="48" name="Shape 46"/>
           <p:cNvSpPr/>
           <p:nvPr/>
         </p:nvSpPr>
@@ -22162,7 +22279,7 @@
       </p:sp>
       <p:sp>
         <p:nvSpPr>
-          <p:cNvPr id="48" name="Text 46"/>
+          <p:cNvPr id="49" name="Text 47"/>
           <p:cNvSpPr/>
           <p:nvPr/>
         </p:nvSpPr>
@@ -22196,45 +22313,6 @@
               <a:t>c</a:t>
             </a:r>
             <a:endParaRPr lang="en-US" sz="900" dirty="0"/>
-          </a:p>
-        </p:txBody>
-      </p:sp>
-      <p:sp>
-        <p:nvSpPr>
-          <p:cNvPr id="49" name="Text 47"/>
-          <p:cNvSpPr/>
-          <p:nvPr/>
-        </p:nvSpPr>
-        <p:spPr>
-          <a:xfrm>
-            <a:off x="5254752" y="4572000"/>
-            <a:ext cx="685800" cy="219456"/>
-          </a:xfrm>
-          <a:prstGeom prst="rect">
-            <a:avLst/>
-          </a:prstGeom>
-          <a:noFill/>
-          <a:ln/>
-        </p:spPr>
-        <p:txBody>
-          <a:bodyPr wrap="square" lIns="0" tIns="0" rIns="0" bIns="0" rtlCol="0" anchor="t"/>
-          <a:lstStyle/>
-          <a:p>
-            <a:pPr algn="ctr" indent="0" marL="0">
-              <a:buNone/>
-            </a:pPr>
-            <a:r>
-              <a:rPr lang="en-US" sz="750" i="1" dirty="0">
-                <a:solidFill>
-                  <a:srgbClr val="94A3B8"/>
-                </a:solidFill>
-                <a:latin typeface="Calibri" pitchFamily="34" charset="0"/>
-                <a:ea typeface="Calibri" pitchFamily="34" charset="-122"/>
-                <a:cs typeface="Calibri" pitchFamily="34" charset="-120"/>
-              </a:rPr>
-              <a:t>/k/</a:t>
-            </a:r>
-            <a:endParaRPr lang="en-US" sz="750" dirty="0"/>
           </a:p>
         </p:txBody>
       </p:sp>
@@ -22900,7 +22978,7 @@
                 <a:ea typeface="Trebuchet MS" pitchFamily="34" charset="-122"/>
                 <a:cs typeface="Trebuchet MS" pitchFamily="34" charset="-120"/>
               </a:rPr>
-              <a:t>reflecting</a:t>
+              <a:t>inflection</a:t>
             </a:r>
             <a:endParaRPr lang="en-US" sz="2800" dirty="0"/>
           </a:p>
@@ -23727,7 +23805,7 @@
                 <a:ea typeface="Trebuchet MS" pitchFamily="34" charset="-122"/>
                 <a:cs typeface="Trebuchet MS" pitchFamily="34" charset="-120"/>
               </a:rPr>
-              <a:t>reflecting</a:t>
+              <a:t>inflection</a:t>
             </a:r>
             <a:endParaRPr lang="en-US" sz="2800" dirty="0"/>
           </a:p>
@@ -23866,7 +23944,7 @@
                 <a:ea typeface="Trebuchet MS" pitchFamily="34" charset="-122"/>
                 <a:cs typeface="Trebuchet MS" pitchFamily="34" charset="-120"/>
               </a:rPr>
-              <a:t>re</a:t>
+              <a:t>in</a:t>
             </a:r>
             <a:endParaRPr lang="en-US" sz="1300" dirty="0"/>
           </a:p>
@@ -23905,7 +23983,7 @@
                 <a:ea typeface="Calibri" pitchFamily="34" charset="-122"/>
                 <a:cs typeface="Calibri" pitchFamily="34" charset="-120"/>
               </a:rPr>
-              <a:t>back, again</a:t>
+              <a:t>into, upon</a:t>
             </a:r>
             <a:endParaRPr lang="en-US" sz="850" dirty="0"/>
           </a:p>
@@ -24090,7 +24168,7 @@
                 <a:ea typeface="Trebuchet MS" pitchFamily="34" charset="-122"/>
                 <a:cs typeface="Trebuchet MS" pitchFamily="34" charset="-120"/>
               </a:rPr>
-              <a:t>ing</a:t>
+              <a:t>ion</a:t>
             </a:r>
             <a:endParaRPr lang="en-US" sz="1300" dirty="0"/>
           </a:p>
@@ -24129,7 +24207,7 @@
                 <a:ea typeface="Calibri" pitchFamily="34" charset="-122"/>
                 <a:cs typeface="Calibri" pitchFamily="34" charset="-120"/>
               </a:rPr>
-              <a:t>ongoing action</a:t>
+              <a:t>act or result of</a:t>
             </a:r>
             <a:endParaRPr lang="en-US" sz="850" dirty="0"/>
           </a:p>
@@ -24137,7 +24215,46 @@
       </p:sp>
       <p:sp>
         <p:nvSpPr>
-          <p:cNvPr id="25" name="Shape 23"/>
+          <p:cNvPr id="25" name="Text 23"/>
+          <p:cNvSpPr/>
+          <p:nvPr/>
+        </p:nvSpPr>
+        <p:spPr>
+          <a:xfrm>
+            <a:off x="6519672" y="2752344"/>
+            <a:ext cx="1828800" cy="182880"/>
+          </a:xfrm>
+          <a:prstGeom prst="rect">
+            <a:avLst/>
+          </a:prstGeom>
+          <a:noFill/>
+          <a:ln/>
+        </p:spPr>
+        <p:txBody>
+          <a:bodyPr wrap="square" lIns="0" tIns="0" rIns="0" bIns="0" rtlCol="0" anchor="t"/>
+          <a:lstStyle/>
+          <a:p>
+            <a:pPr algn="ctr" indent="0" marL="0">
+              <a:buNone/>
+            </a:pPr>
+            <a:r>
+              <a:rPr lang="en-US" sz="700" i="1" dirty="0">
+                <a:solidFill>
+                  <a:srgbClr val="94A3B8"/>
+                </a:solidFill>
+                <a:latin typeface="Calibri" pitchFamily="34" charset="0"/>
+                <a:ea typeface="Calibri" pitchFamily="34" charset="-122"/>
+                <a:cs typeface="Calibri" pitchFamily="34" charset="-120"/>
+              </a:rPr>
+              <a:t>'t' added before '-ion' suffix</a:t>
+            </a:r>
+            <a:endParaRPr lang="en-US" sz="700" dirty="0"/>
+          </a:p>
+        </p:txBody>
+      </p:sp>
+      <p:sp>
+        <p:nvSpPr>
+          <p:cNvPr id="26" name="Shape 24"/>
           <p:cNvSpPr/>
           <p:nvPr/>
         </p:nvSpPr>
@@ -24164,7 +24281,7 @@
       </p:sp>
       <p:sp>
         <p:nvSpPr>
-          <p:cNvPr id="26" name="Text 24"/>
+          <p:cNvPr id="27" name="Text 25"/>
           <p:cNvSpPr/>
           <p:nvPr/>
         </p:nvSpPr>
@@ -24203,7 +24320,7 @@
       </p:sp>
       <p:sp>
         <p:nvSpPr>
-          <p:cNvPr id="27" name="Shape 25"/>
+          <p:cNvPr id="28" name="Shape 26"/>
           <p:cNvSpPr/>
           <p:nvPr/>
         </p:nvSpPr>
@@ -24230,7 +24347,7 @@
       </p:sp>
       <p:sp>
         <p:nvSpPr>
-          <p:cNvPr id="28" name="Text 26"/>
+          <p:cNvPr id="29" name="Text 27"/>
           <p:cNvSpPr/>
           <p:nvPr/>
         </p:nvSpPr>
@@ -24269,7 +24386,7 @@
       </p:sp>
       <p:sp>
         <p:nvSpPr>
-          <p:cNvPr id="29" name="Shape 27"/>
+          <p:cNvPr id="30" name="Shape 28"/>
           <p:cNvSpPr/>
           <p:nvPr/>
         </p:nvSpPr>
@@ -24296,7 +24413,7 @@
       </p:sp>
       <p:sp>
         <p:nvSpPr>
-          <p:cNvPr id="30" name="Text 28"/>
+          <p:cNvPr id="31" name="Text 29"/>
           <p:cNvSpPr/>
           <p:nvPr/>
         </p:nvSpPr>
@@ -24335,7 +24452,7 @@
       </p:sp>
       <p:sp>
         <p:nvSpPr>
-          <p:cNvPr id="31" name="Shape 29"/>
+          <p:cNvPr id="32" name="Shape 30"/>
           <p:cNvSpPr/>
           <p:nvPr/>
         </p:nvSpPr>
@@ -24362,7 +24479,7 @@
       </p:sp>
       <p:sp>
         <p:nvSpPr>
-          <p:cNvPr id="32" name="Text 30"/>
+          <p:cNvPr id="33" name="Text 31"/>
           <p:cNvSpPr/>
           <p:nvPr/>
         </p:nvSpPr>
@@ -25543,7 +25660,7 @@
                 <a:ea typeface="Trebuchet MS" pitchFamily="34" charset="-122"/>
                 <a:cs typeface="Trebuchet MS" pitchFamily="34" charset="-120"/>
               </a:rPr>
-              <a:t>reflecting</a:t>
+              <a:t>inflection</a:t>
             </a:r>
             <a:endParaRPr lang="en-US" sz="2800" dirty="0"/>
           </a:p>
@@ -25682,7 +25799,7 @@
                 <a:ea typeface="Trebuchet MS" pitchFamily="34" charset="-122"/>
                 <a:cs typeface="Trebuchet MS" pitchFamily="34" charset="-120"/>
               </a:rPr>
-              <a:t>re</a:t>
+              <a:t>in</a:t>
             </a:r>
             <a:endParaRPr lang="en-US" sz="1300" dirty="0"/>
           </a:p>
@@ -25721,7 +25838,7 @@
                 <a:ea typeface="Calibri" pitchFamily="34" charset="-122"/>
                 <a:cs typeface="Calibri" pitchFamily="34" charset="-120"/>
               </a:rPr>
-              <a:t>back, again</a:t>
+              <a:t>into, upon</a:t>
             </a:r>
             <a:endParaRPr lang="en-US" sz="850" dirty="0"/>
           </a:p>
@@ -25906,7 +26023,7 @@
                 <a:ea typeface="Trebuchet MS" pitchFamily="34" charset="-122"/>
                 <a:cs typeface="Trebuchet MS" pitchFamily="34" charset="-120"/>
               </a:rPr>
-              <a:t>ing</a:t>
+              <a:t>ion</a:t>
             </a:r>
             <a:endParaRPr lang="en-US" sz="1300" dirty="0"/>
           </a:p>
@@ -25945,7 +26062,7 @@
                 <a:ea typeface="Calibri" pitchFamily="34" charset="-122"/>
                 <a:cs typeface="Calibri" pitchFamily="34" charset="-120"/>
               </a:rPr>
-              <a:t>ongoing action</a:t>
+              <a:t>act or result of</a:t>
             </a:r>
             <a:endParaRPr lang="en-US" sz="850" dirty="0"/>
           </a:p>
@@ -25953,7 +26070,46 @@
       </p:sp>
       <p:sp>
         <p:nvSpPr>
-          <p:cNvPr id="25" name="Shape 23"/>
+          <p:cNvPr id="25" name="Text 23"/>
+          <p:cNvSpPr/>
+          <p:nvPr/>
+        </p:nvSpPr>
+        <p:spPr>
+          <a:xfrm>
+            <a:off x="6519672" y="2752344"/>
+            <a:ext cx="1828800" cy="182880"/>
+          </a:xfrm>
+          <a:prstGeom prst="rect">
+            <a:avLst/>
+          </a:prstGeom>
+          <a:noFill/>
+          <a:ln/>
+        </p:spPr>
+        <p:txBody>
+          <a:bodyPr wrap="square" lIns="0" tIns="0" rIns="0" bIns="0" rtlCol="0" anchor="t"/>
+          <a:lstStyle/>
+          <a:p>
+            <a:pPr algn="ctr" indent="0" marL="0">
+              <a:buNone/>
+            </a:pPr>
+            <a:r>
+              <a:rPr lang="en-US" sz="700" i="1" dirty="0">
+                <a:solidFill>
+                  <a:srgbClr val="94A3B8"/>
+                </a:solidFill>
+                <a:latin typeface="Calibri" pitchFamily="34" charset="0"/>
+                <a:ea typeface="Calibri" pitchFamily="34" charset="-122"/>
+                <a:cs typeface="Calibri" pitchFamily="34" charset="-120"/>
+              </a:rPr>
+              <a:t>'t' added before '-ion' suffix</a:t>
+            </a:r>
+            <a:endParaRPr lang="en-US" sz="700" dirty="0"/>
+          </a:p>
+        </p:txBody>
+      </p:sp>
+      <p:sp>
+        <p:nvSpPr>
+          <p:cNvPr id="26" name="Shape 24"/>
           <p:cNvSpPr/>
           <p:nvPr/>
         </p:nvSpPr>
@@ -25980,7 +26136,7 @@
       </p:sp>
       <p:sp>
         <p:nvSpPr>
-          <p:cNvPr id="26" name="Text 24"/>
+          <p:cNvPr id="27" name="Text 25"/>
           <p:cNvSpPr/>
           <p:nvPr/>
         </p:nvSpPr>
@@ -26019,7 +26175,7 @@
       </p:sp>
       <p:sp>
         <p:nvSpPr>
-          <p:cNvPr id="27" name="Shape 25"/>
+          <p:cNvPr id="28" name="Shape 26"/>
           <p:cNvSpPr/>
           <p:nvPr/>
         </p:nvSpPr>
@@ -26046,7 +26202,7 @@
       </p:sp>
       <p:sp>
         <p:nvSpPr>
-          <p:cNvPr id="28" name="Shape 26"/>
+          <p:cNvPr id="29" name="Shape 27"/>
           <p:cNvSpPr/>
           <p:nvPr/>
         </p:nvSpPr>
@@ -26073,7 +26229,7 @@
       </p:sp>
       <p:sp>
         <p:nvSpPr>
-          <p:cNvPr id="29" name="Text 27"/>
+          <p:cNvPr id="30" name="Text 28"/>
           <p:cNvSpPr/>
           <p:nvPr/>
         </p:nvSpPr>
@@ -26104,7 +26260,7 @@
                 <a:ea typeface="Trebuchet MS" pitchFamily="34" charset="-122"/>
                 <a:cs typeface="Trebuchet MS" pitchFamily="34" charset="-120"/>
               </a:rPr>
-              <a:t>re</a:t>
+              <a:t>in</a:t>
             </a:r>
             <a:endParaRPr lang="en-US" sz="1400" dirty="0"/>
           </a:p>
@@ -26112,7 +26268,7 @@
       </p:sp>
       <p:sp>
         <p:nvSpPr>
-          <p:cNvPr id="30" name="Text 28"/>
+          <p:cNvPr id="31" name="Text 29"/>
           <p:cNvSpPr/>
           <p:nvPr/>
         </p:nvSpPr>
@@ -26151,7 +26307,7 @@
       </p:sp>
       <p:sp>
         <p:nvSpPr>
-          <p:cNvPr id="31" name="Shape 29"/>
+          <p:cNvPr id="32" name="Shape 30"/>
           <p:cNvSpPr/>
           <p:nvPr/>
         </p:nvSpPr>
@@ -26178,7 +26334,7 @@
       </p:sp>
       <p:sp>
         <p:nvSpPr>
-          <p:cNvPr id="32" name="Text 30"/>
+          <p:cNvPr id="33" name="Text 31"/>
           <p:cNvSpPr/>
           <p:nvPr/>
         </p:nvSpPr>
@@ -26209,7 +26365,7 @@
                 <a:ea typeface="Trebuchet MS" pitchFamily="34" charset="-122"/>
                 <a:cs typeface="Trebuchet MS" pitchFamily="34" charset="-120"/>
               </a:rPr>
-              <a:t>flect</a:t>
+              <a:t>flec</a:t>
             </a:r>
             <a:endParaRPr lang="en-US" sz="1400" dirty="0"/>
           </a:p>
@@ -26217,7 +26373,7 @@
       </p:sp>
       <p:sp>
         <p:nvSpPr>
-          <p:cNvPr id="33" name="Text 31"/>
+          <p:cNvPr id="34" name="Text 32"/>
           <p:cNvSpPr/>
           <p:nvPr/>
         </p:nvSpPr>
@@ -26256,7 +26412,7 @@
       </p:sp>
       <p:sp>
         <p:nvSpPr>
-          <p:cNvPr id="34" name="Shape 32"/>
+          <p:cNvPr id="35" name="Shape 33"/>
           <p:cNvSpPr/>
           <p:nvPr/>
         </p:nvSpPr>
@@ -26283,7 +26439,7 @@
       </p:sp>
       <p:sp>
         <p:nvSpPr>
-          <p:cNvPr id="35" name="Text 33"/>
+          <p:cNvPr id="36" name="Text 34"/>
           <p:cNvSpPr/>
           <p:nvPr/>
         </p:nvSpPr>
@@ -26314,7 +26470,7 @@
                 <a:ea typeface="Trebuchet MS" pitchFamily="34" charset="-122"/>
                 <a:cs typeface="Trebuchet MS" pitchFamily="34" charset="-120"/>
               </a:rPr>
-              <a:t>ing</a:t>
+              <a:t>tion</a:t>
             </a:r>
             <a:endParaRPr lang="en-US" sz="1400" dirty="0"/>
           </a:p>
@@ -26322,7 +26478,7 @@
       </p:sp>
       <p:sp>
         <p:nvSpPr>
-          <p:cNvPr id="36" name="Shape 34"/>
+          <p:cNvPr id="37" name="Shape 35"/>
           <p:cNvSpPr/>
           <p:nvPr/>
         </p:nvSpPr>
@@ -26349,7 +26505,7 @@
       </p:sp>
       <p:sp>
         <p:nvSpPr>
-          <p:cNvPr id="37" name="Text 35"/>
+          <p:cNvPr id="38" name="Text 36"/>
           <p:cNvSpPr/>
           <p:nvPr/>
         </p:nvSpPr>
@@ -26388,7 +26544,7 @@
       </p:sp>
       <p:sp>
         <p:nvSpPr>
-          <p:cNvPr id="38" name="Shape 36"/>
+          <p:cNvPr id="39" name="Shape 37"/>
           <p:cNvSpPr/>
           <p:nvPr/>
         </p:nvSpPr>
@@ -26415,7 +26571,7 @@
       </p:sp>
       <p:sp>
         <p:nvSpPr>
-          <p:cNvPr id="39" name="Text 37"/>
+          <p:cNvPr id="40" name="Text 38"/>
           <p:cNvSpPr/>
           <p:nvPr/>
         </p:nvSpPr>
@@ -26877,7 +27033,7 @@
                 <a:ea typeface="Trebuchet MS" pitchFamily="34" charset="-122"/>
                 <a:cs typeface="Trebuchet MS" pitchFamily="34" charset="-120"/>
               </a:rPr>
-              <a:t>reflecting</a:t>
+              <a:t>inflection</a:t>
             </a:r>
             <a:endParaRPr lang="en-US" sz="2800" dirty="0"/>
           </a:p>
@@ -27016,7 +27172,7 @@
                 <a:ea typeface="Trebuchet MS" pitchFamily="34" charset="-122"/>
                 <a:cs typeface="Trebuchet MS" pitchFamily="34" charset="-120"/>
               </a:rPr>
-              <a:t>re</a:t>
+              <a:t>in</a:t>
             </a:r>
             <a:endParaRPr lang="en-US" sz="1300" dirty="0"/>
           </a:p>
@@ -27055,7 +27211,7 @@
                 <a:ea typeface="Calibri" pitchFamily="34" charset="-122"/>
                 <a:cs typeface="Calibri" pitchFamily="34" charset="-120"/>
               </a:rPr>
-              <a:t>back, again</a:t>
+              <a:t>into, upon</a:t>
             </a:r>
             <a:endParaRPr lang="en-US" sz="850" dirty="0"/>
           </a:p>
@@ -27240,7 +27396,7 @@
                 <a:ea typeface="Trebuchet MS" pitchFamily="34" charset="-122"/>
                 <a:cs typeface="Trebuchet MS" pitchFamily="34" charset="-120"/>
               </a:rPr>
-              <a:t>ing</a:t>
+              <a:t>ion</a:t>
             </a:r>
             <a:endParaRPr lang="en-US" sz="1300" dirty="0"/>
           </a:p>
@@ -27279,7 +27435,7 @@
                 <a:ea typeface="Calibri" pitchFamily="34" charset="-122"/>
                 <a:cs typeface="Calibri" pitchFamily="34" charset="-120"/>
               </a:rPr>
-              <a:t>ongoing action</a:t>
+              <a:t>act or result of</a:t>
             </a:r>
             <a:endParaRPr lang="en-US" sz="850" dirty="0"/>
           </a:p>
@@ -27287,7 +27443,46 @@
       </p:sp>
       <p:sp>
         <p:nvSpPr>
-          <p:cNvPr id="25" name="Shape 23"/>
+          <p:cNvPr id="25" name="Text 23"/>
+          <p:cNvSpPr/>
+          <p:nvPr/>
+        </p:nvSpPr>
+        <p:spPr>
+          <a:xfrm>
+            <a:off x="6519672" y="2752344"/>
+            <a:ext cx="1828800" cy="182880"/>
+          </a:xfrm>
+          <a:prstGeom prst="rect">
+            <a:avLst/>
+          </a:prstGeom>
+          <a:noFill/>
+          <a:ln/>
+        </p:spPr>
+        <p:txBody>
+          <a:bodyPr wrap="square" lIns="0" tIns="0" rIns="0" bIns="0" rtlCol="0" anchor="t"/>
+          <a:lstStyle/>
+          <a:p>
+            <a:pPr algn="ctr" indent="0" marL="0">
+              <a:buNone/>
+            </a:pPr>
+            <a:r>
+              <a:rPr lang="en-US" sz="700" i="1" dirty="0">
+                <a:solidFill>
+                  <a:srgbClr val="94A3B8"/>
+                </a:solidFill>
+                <a:latin typeface="Calibri" pitchFamily="34" charset="0"/>
+                <a:ea typeface="Calibri" pitchFamily="34" charset="-122"/>
+                <a:cs typeface="Calibri" pitchFamily="34" charset="-120"/>
+              </a:rPr>
+              <a:t>'t' added before '-ion' suffix</a:t>
+            </a:r>
+            <a:endParaRPr lang="en-US" sz="700" dirty="0"/>
+          </a:p>
+        </p:txBody>
+      </p:sp>
+      <p:sp>
+        <p:nvSpPr>
+          <p:cNvPr id="26" name="Shape 24"/>
           <p:cNvSpPr/>
           <p:nvPr/>
         </p:nvSpPr>
@@ -27314,7 +27509,7 @@
       </p:sp>
       <p:sp>
         <p:nvSpPr>
-          <p:cNvPr id="26" name="Text 24"/>
+          <p:cNvPr id="27" name="Text 25"/>
           <p:cNvSpPr/>
           <p:nvPr/>
         </p:nvSpPr>
@@ -27353,7 +27548,7 @@
       </p:sp>
       <p:sp>
         <p:nvSpPr>
-          <p:cNvPr id="27" name="Shape 25"/>
+          <p:cNvPr id="28" name="Shape 26"/>
           <p:cNvSpPr/>
           <p:nvPr/>
         </p:nvSpPr>
@@ -27380,7 +27575,7 @@
       </p:sp>
       <p:sp>
         <p:nvSpPr>
-          <p:cNvPr id="28" name="Shape 26"/>
+          <p:cNvPr id="29" name="Shape 27"/>
           <p:cNvSpPr/>
           <p:nvPr/>
         </p:nvSpPr>
@@ -27407,7 +27602,7 @@
       </p:sp>
       <p:sp>
         <p:nvSpPr>
-          <p:cNvPr id="29" name="Text 27"/>
+          <p:cNvPr id="30" name="Text 28"/>
           <p:cNvSpPr/>
           <p:nvPr/>
         </p:nvSpPr>
@@ -27438,7 +27633,7 @@
                 <a:ea typeface="Trebuchet MS" pitchFamily="34" charset="-122"/>
                 <a:cs typeface="Trebuchet MS" pitchFamily="34" charset="-120"/>
               </a:rPr>
-              <a:t>re</a:t>
+              <a:t>in</a:t>
             </a:r>
             <a:endParaRPr lang="en-US" sz="1400" dirty="0"/>
           </a:p>
@@ -27446,7 +27641,7 @@
       </p:sp>
       <p:sp>
         <p:nvSpPr>
-          <p:cNvPr id="30" name="Text 28"/>
+          <p:cNvPr id="31" name="Text 29"/>
           <p:cNvSpPr/>
           <p:nvPr/>
         </p:nvSpPr>
@@ -27485,7 +27680,7 @@
       </p:sp>
       <p:sp>
         <p:nvSpPr>
-          <p:cNvPr id="31" name="Shape 29"/>
+          <p:cNvPr id="32" name="Shape 30"/>
           <p:cNvSpPr/>
           <p:nvPr/>
         </p:nvSpPr>
@@ -27512,7 +27707,7 @@
       </p:sp>
       <p:sp>
         <p:nvSpPr>
-          <p:cNvPr id="32" name="Text 30"/>
+          <p:cNvPr id="33" name="Text 31"/>
           <p:cNvSpPr/>
           <p:nvPr/>
         </p:nvSpPr>
@@ -27543,7 +27738,7 @@
                 <a:ea typeface="Trebuchet MS" pitchFamily="34" charset="-122"/>
                 <a:cs typeface="Trebuchet MS" pitchFamily="34" charset="-120"/>
               </a:rPr>
-              <a:t>flect</a:t>
+              <a:t>flec</a:t>
             </a:r>
             <a:endParaRPr lang="en-US" sz="1400" dirty="0"/>
           </a:p>
@@ -27551,7 +27746,7 @@
       </p:sp>
       <p:sp>
         <p:nvSpPr>
-          <p:cNvPr id="33" name="Text 31"/>
+          <p:cNvPr id="34" name="Text 32"/>
           <p:cNvSpPr/>
           <p:nvPr/>
         </p:nvSpPr>
@@ -27590,7 +27785,7 @@
       </p:sp>
       <p:sp>
         <p:nvSpPr>
-          <p:cNvPr id="34" name="Shape 32"/>
+          <p:cNvPr id="35" name="Shape 33"/>
           <p:cNvSpPr/>
           <p:nvPr/>
         </p:nvSpPr>
@@ -27617,7 +27812,7 @@
       </p:sp>
       <p:sp>
         <p:nvSpPr>
-          <p:cNvPr id="35" name="Text 33"/>
+          <p:cNvPr id="36" name="Text 34"/>
           <p:cNvSpPr/>
           <p:nvPr/>
         </p:nvSpPr>
@@ -27648,7 +27843,7 @@
                 <a:ea typeface="Trebuchet MS" pitchFamily="34" charset="-122"/>
                 <a:cs typeface="Trebuchet MS" pitchFamily="34" charset="-120"/>
               </a:rPr>
-              <a:t>ing</a:t>
+              <a:t>tion</a:t>
             </a:r>
             <a:endParaRPr lang="en-US" sz="1400" dirty="0"/>
           </a:p>
@@ -27656,7 +27851,7 @@
       </p:sp>
       <p:sp>
         <p:nvSpPr>
-          <p:cNvPr id="36" name="Shape 34"/>
+          <p:cNvPr id="37" name="Shape 35"/>
           <p:cNvSpPr/>
           <p:nvPr/>
         </p:nvSpPr>
@@ -27683,7 +27878,7 @@
       </p:sp>
       <p:sp>
         <p:nvSpPr>
-          <p:cNvPr id="37" name="Text 35"/>
+          <p:cNvPr id="38" name="Text 36"/>
           <p:cNvSpPr/>
           <p:nvPr/>
         </p:nvSpPr>
@@ -27722,7 +27917,7 @@
       </p:sp>
       <p:sp>
         <p:nvSpPr>
-          <p:cNvPr id="38" name="Shape 36"/>
+          <p:cNvPr id="39" name="Shape 37"/>
           <p:cNvSpPr/>
           <p:nvPr/>
         </p:nvSpPr>
@@ -27749,13 +27944,13 @@
       </p:sp>
       <p:sp>
         <p:nvSpPr>
-          <p:cNvPr id="39" name="Shape 37"/>
-          <p:cNvSpPr/>
-          <p:nvPr/>
-        </p:nvSpPr>
-        <p:spPr>
-          <a:xfrm>
-            <a:off x="2124837" y="4169664"/>
+          <p:cNvPr id="40" name="Shape 38"/>
+          <p:cNvSpPr/>
+          <p:nvPr/>
+        </p:nvSpPr>
+        <p:spPr>
+          <a:xfrm>
+            <a:off x="2023872" y="4169664"/>
             <a:ext cx="685800" cy="384048"/>
           </a:xfrm>
           <a:prstGeom prst="rect">
@@ -27776,13 +27971,13 @@
       </p:sp>
       <p:sp>
         <p:nvSpPr>
-          <p:cNvPr id="40" name="Text 38"/>
-          <p:cNvSpPr/>
-          <p:nvPr/>
-        </p:nvSpPr>
-        <p:spPr>
-          <a:xfrm>
-            <a:off x="2124837" y="4169664"/>
+          <p:cNvPr id="41" name="Text 39"/>
+          <p:cNvSpPr/>
+          <p:nvPr/>
+        </p:nvSpPr>
+        <p:spPr>
+          <a:xfrm>
+            <a:off x="2023872" y="4169664"/>
             <a:ext cx="685800" cy="384048"/>
           </a:xfrm>
           <a:prstGeom prst="rect">
@@ -27807,7 +28002,7 @@
                 <a:ea typeface="Trebuchet MS" pitchFamily="34" charset="-122"/>
                 <a:cs typeface="Trebuchet MS" pitchFamily="34" charset="-120"/>
               </a:rPr>
-              <a:t>r</a:t>
+              <a:t>i</a:t>
             </a:r>
             <a:endParaRPr lang="en-US" sz="900" dirty="0"/>
           </a:p>
@@ -27815,13 +28010,13 @@
       </p:sp>
       <p:sp>
         <p:nvSpPr>
-          <p:cNvPr id="41" name="Shape 39"/>
-          <p:cNvSpPr/>
-          <p:nvPr/>
-        </p:nvSpPr>
-        <p:spPr>
-          <a:xfrm>
-            <a:off x="3033522" y="4169664"/>
+          <p:cNvPr id="42" name="Shape 40"/>
+          <p:cNvSpPr/>
+          <p:nvPr/>
+        </p:nvSpPr>
+        <p:spPr>
+          <a:xfrm>
+            <a:off x="2831592" y="4169664"/>
             <a:ext cx="685800" cy="384048"/>
           </a:xfrm>
           <a:prstGeom prst="rect">
@@ -27842,13 +28037,13 @@
       </p:sp>
       <p:sp>
         <p:nvSpPr>
-          <p:cNvPr id="42" name="Text 40"/>
-          <p:cNvSpPr/>
-          <p:nvPr/>
-        </p:nvSpPr>
-        <p:spPr>
-          <a:xfrm>
-            <a:off x="3033522" y="4169664"/>
+          <p:cNvPr id="43" name="Text 41"/>
+          <p:cNvSpPr/>
+          <p:nvPr/>
+        </p:nvSpPr>
+        <p:spPr>
+          <a:xfrm>
+            <a:off x="2831592" y="4169664"/>
             <a:ext cx="685800" cy="384048"/>
           </a:xfrm>
           <a:prstGeom prst="rect">
@@ -27873,7 +28068,7 @@
                 <a:ea typeface="Trebuchet MS" pitchFamily="34" charset="-122"/>
                 <a:cs typeface="Trebuchet MS" pitchFamily="34" charset="-120"/>
               </a:rPr>
-              <a:t>e</a:t>
+              <a:t>n</a:t>
             </a:r>
             <a:endParaRPr lang="en-US" sz="900" dirty="0"/>
           </a:p>
@@ -27881,13 +28076,13 @@
       </p:sp>
       <p:sp>
         <p:nvSpPr>
-          <p:cNvPr id="43" name="Shape 41"/>
-          <p:cNvSpPr/>
-          <p:nvPr/>
-        </p:nvSpPr>
-        <p:spPr>
-          <a:xfrm>
-            <a:off x="3942207" y="4169664"/>
+          <p:cNvPr id="44" name="Shape 42"/>
+          <p:cNvSpPr/>
+          <p:nvPr/>
+        </p:nvSpPr>
+        <p:spPr>
+          <a:xfrm>
+            <a:off x="3639312" y="4169664"/>
             <a:ext cx="685800" cy="384048"/>
           </a:xfrm>
           <a:prstGeom prst="rect">
@@ -27908,13 +28103,13 @@
       </p:sp>
       <p:sp>
         <p:nvSpPr>
-          <p:cNvPr id="44" name="Text 42"/>
-          <p:cNvSpPr/>
-          <p:nvPr/>
-        </p:nvSpPr>
-        <p:spPr>
-          <a:xfrm>
-            <a:off x="3942207" y="4169664"/>
+          <p:cNvPr id="45" name="Text 43"/>
+          <p:cNvSpPr/>
+          <p:nvPr/>
+        </p:nvSpPr>
+        <p:spPr>
+          <a:xfrm>
+            <a:off x="3639312" y="4169664"/>
             <a:ext cx="685800" cy="384048"/>
           </a:xfrm>
           <a:prstGeom prst="rect">
@@ -27947,13 +28142,13 @@
       </p:sp>
       <p:sp>
         <p:nvSpPr>
-          <p:cNvPr id="45" name="Shape 43"/>
-          <p:cNvSpPr/>
-          <p:nvPr/>
-        </p:nvSpPr>
-        <p:spPr>
-          <a:xfrm>
-            <a:off x="4850892" y="4169664"/>
+          <p:cNvPr id="46" name="Shape 44"/>
+          <p:cNvSpPr/>
+          <p:nvPr/>
+        </p:nvSpPr>
+        <p:spPr>
+          <a:xfrm>
+            <a:off x="4447032" y="4169664"/>
             <a:ext cx="685800" cy="384048"/>
           </a:xfrm>
           <a:prstGeom prst="rect">
@@ -27974,13 +28169,13 @@
       </p:sp>
       <p:sp>
         <p:nvSpPr>
-          <p:cNvPr id="46" name="Text 44"/>
-          <p:cNvSpPr/>
-          <p:nvPr/>
-        </p:nvSpPr>
-        <p:spPr>
-          <a:xfrm>
-            <a:off x="4850892" y="4169664"/>
+          <p:cNvPr id="47" name="Text 45"/>
+          <p:cNvSpPr/>
+          <p:nvPr/>
+        </p:nvSpPr>
+        <p:spPr>
+          <a:xfrm>
+            <a:off x="4447032" y="4169664"/>
             <a:ext cx="685800" cy="384048"/>
           </a:xfrm>
           <a:prstGeom prst="rect">
@@ -28013,13 +28208,13 @@
       </p:sp>
       <p:sp>
         <p:nvSpPr>
-          <p:cNvPr id="47" name="Shape 45"/>
-          <p:cNvSpPr/>
-          <p:nvPr/>
-        </p:nvSpPr>
-        <p:spPr>
-          <a:xfrm>
-            <a:off x="5759577" y="4169664"/>
+          <p:cNvPr id="48" name="Shape 46"/>
+          <p:cNvSpPr/>
+          <p:nvPr/>
+        </p:nvSpPr>
+        <p:spPr>
+          <a:xfrm>
+            <a:off x="5254752" y="4169664"/>
             <a:ext cx="685800" cy="384048"/>
           </a:xfrm>
           <a:prstGeom prst="rect">
@@ -28040,13 +28235,13 @@
       </p:sp>
       <p:sp>
         <p:nvSpPr>
-          <p:cNvPr id="48" name="Text 46"/>
-          <p:cNvSpPr/>
-          <p:nvPr/>
-        </p:nvSpPr>
-        <p:spPr>
-          <a:xfrm>
-            <a:off x="5759577" y="4169664"/>
+          <p:cNvPr id="49" name="Text 47"/>
+          <p:cNvSpPr/>
+          <p:nvPr/>
+        </p:nvSpPr>
+        <p:spPr>
+          <a:xfrm>
+            <a:off x="5254752" y="4169664"/>
             <a:ext cx="685800" cy="384048"/>
           </a:xfrm>
           <a:prstGeom prst="rect">
@@ -28071,7 +28266,7 @@
                 <a:ea typeface="Trebuchet MS" pitchFamily="34" charset="-122"/>
                 <a:cs typeface="Trebuchet MS" pitchFamily="34" charset="-120"/>
               </a:rPr>
-              <a:t>ct</a:t>
+              <a:t>c</a:t>
             </a:r>
             <a:endParaRPr lang="en-US" sz="900" dirty="0"/>
           </a:p>
@@ -28079,13 +28274,145 @@
       </p:sp>
       <p:sp>
         <p:nvSpPr>
-          <p:cNvPr id="49" name="Text 47"/>
-          <p:cNvSpPr/>
-          <p:nvPr/>
-        </p:nvSpPr>
-        <p:spPr>
-          <a:xfrm>
-            <a:off x="5759577" y="4572000"/>
+          <p:cNvPr id="50" name="Shape 48"/>
+          <p:cNvSpPr/>
+          <p:nvPr/>
+        </p:nvSpPr>
+        <p:spPr>
+          <a:xfrm>
+            <a:off x="6062472" y="4169664"/>
+            <a:ext cx="685800" cy="384048"/>
+          </a:xfrm>
+          <a:prstGeom prst="rect">
+            <a:avLst>
+              <a:gd name="adj" fmla="val 9524"/>
+            </a:avLst>
+          </a:prstGeom>
+          <a:solidFill>
+            <a:srgbClr val="FFFFFF"/>
+          </a:solidFill>
+          <a:ln w="12700">
+            <a:solidFill>
+              <a:srgbClr val="DB2777"/>
+            </a:solidFill>
+            <a:prstDash val="solid"/>
+          </a:ln>
+        </p:spPr>
+      </p:sp>
+      <p:sp>
+        <p:nvSpPr>
+          <p:cNvPr id="51" name="Text 49"/>
+          <p:cNvSpPr/>
+          <p:nvPr/>
+        </p:nvSpPr>
+        <p:spPr>
+          <a:xfrm>
+            <a:off x="6062472" y="4169664"/>
+            <a:ext cx="685800" cy="384048"/>
+          </a:xfrm>
+          <a:prstGeom prst="rect">
+            <a:avLst/>
+          </a:prstGeom>
+          <a:noFill/>
+          <a:ln/>
+        </p:spPr>
+        <p:txBody>
+          <a:bodyPr wrap="square" lIns="0" tIns="0" rIns="0" bIns="0" rtlCol="0" anchor="ctr"/>
+          <a:lstStyle/>
+          <a:p>
+            <a:pPr algn="ctr" indent="0" marL="0">
+              <a:buNone/>
+            </a:pPr>
+            <a:r>
+              <a:rPr lang="en-US" sz="900" b="1" dirty="0">
+                <a:solidFill>
+                  <a:srgbClr val="9D174D"/>
+                </a:solidFill>
+                <a:latin typeface="Trebuchet MS" pitchFamily="34" charset="0"/>
+                <a:ea typeface="Trebuchet MS" pitchFamily="34" charset="-122"/>
+                <a:cs typeface="Trebuchet MS" pitchFamily="34" charset="-120"/>
+              </a:rPr>
+              <a:t>t</a:t>
+            </a:r>
+            <a:endParaRPr lang="en-US" sz="900" dirty="0"/>
+          </a:p>
+        </p:txBody>
+      </p:sp>
+      <p:sp>
+        <p:nvSpPr>
+          <p:cNvPr id="52" name="Shape 50"/>
+          <p:cNvSpPr/>
+          <p:nvPr/>
+        </p:nvSpPr>
+        <p:spPr>
+          <a:xfrm>
+            <a:off x="6870192" y="4169664"/>
+            <a:ext cx="685800" cy="384048"/>
+          </a:xfrm>
+          <a:prstGeom prst="rect">
+            <a:avLst>
+              <a:gd name="adj" fmla="val 9524"/>
+            </a:avLst>
+          </a:prstGeom>
+          <a:solidFill>
+            <a:srgbClr val="FFFFFF"/>
+          </a:solidFill>
+          <a:ln w="12700">
+            <a:solidFill>
+              <a:srgbClr val="DB2777"/>
+            </a:solidFill>
+            <a:prstDash val="solid"/>
+          </a:ln>
+        </p:spPr>
+      </p:sp>
+      <p:sp>
+        <p:nvSpPr>
+          <p:cNvPr id="53" name="Text 51"/>
+          <p:cNvSpPr/>
+          <p:nvPr/>
+        </p:nvSpPr>
+        <p:spPr>
+          <a:xfrm>
+            <a:off x="6870192" y="4169664"/>
+            <a:ext cx="685800" cy="384048"/>
+          </a:xfrm>
+          <a:prstGeom prst="rect">
+            <a:avLst/>
+          </a:prstGeom>
+          <a:noFill/>
+          <a:ln/>
+        </p:spPr>
+        <p:txBody>
+          <a:bodyPr wrap="square" lIns="0" tIns="0" rIns="0" bIns="0" rtlCol="0" anchor="ctr"/>
+          <a:lstStyle/>
+          <a:p>
+            <a:pPr algn="ctr" indent="0" marL="0">
+              <a:buNone/>
+            </a:pPr>
+            <a:r>
+              <a:rPr lang="en-US" sz="900" b="1" dirty="0">
+                <a:solidFill>
+                  <a:srgbClr val="9D174D"/>
+                </a:solidFill>
+                <a:latin typeface="Trebuchet MS" pitchFamily="34" charset="0"/>
+                <a:ea typeface="Trebuchet MS" pitchFamily="34" charset="-122"/>
+                <a:cs typeface="Trebuchet MS" pitchFamily="34" charset="-120"/>
+              </a:rPr>
+              <a:t>io</a:t>
+            </a:r>
+            <a:endParaRPr lang="en-US" sz="900" dirty="0"/>
+          </a:p>
+        </p:txBody>
+      </p:sp>
+      <p:sp>
+        <p:nvSpPr>
+          <p:cNvPr id="54" name="Text 52"/>
+          <p:cNvSpPr/>
+          <p:nvPr/>
+        </p:nvSpPr>
+        <p:spPr>
+          <a:xfrm>
+            <a:off x="6870192" y="4572000"/>
             <a:ext cx="685800" cy="219456"/>
           </a:xfrm>
           <a:prstGeom prst="rect">
@@ -28110,7 +28437,7 @@
                 <a:ea typeface="Calibri" pitchFamily="34" charset="-122"/>
                 <a:cs typeface="Calibri" pitchFamily="34" charset="-120"/>
               </a:rPr>
-              <a:t>/kt/</a:t>
+              <a:t>/sh/</a:t>
             </a:r>
             <a:endParaRPr lang="en-US" sz="750" dirty="0"/>
           </a:p>
@@ -28118,13 +28445,13 @@
       </p:sp>
       <p:sp>
         <p:nvSpPr>
-          <p:cNvPr id="50" name="Shape 48"/>
-          <p:cNvSpPr/>
-          <p:nvPr/>
-        </p:nvSpPr>
-        <p:spPr>
-          <a:xfrm>
-            <a:off x="6668262" y="4169664"/>
+          <p:cNvPr id="55" name="Shape 53"/>
+          <p:cNvSpPr/>
+          <p:nvPr/>
+        </p:nvSpPr>
+        <p:spPr>
+          <a:xfrm>
+            <a:off x="7677912" y="4169664"/>
             <a:ext cx="685800" cy="384048"/>
           </a:xfrm>
           <a:prstGeom prst="rect">
@@ -28145,13 +28472,13 @@
       </p:sp>
       <p:sp>
         <p:nvSpPr>
-          <p:cNvPr id="51" name="Text 49"/>
-          <p:cNvSpPr/>
-          <p:nvPr/>
-        </p:nvSpPr>
-        <p:spPr>
-          <a:xfrm>
-            <a:off x="6668262" y="4169664"/>
+          <p:cNvPr id="56" name="Text 54"/>
+          <p:cNvSpPr/>
+          <p:nvPr/>
+        </p:nvSpPr>
+        <p:spPr>
+          <a:xfrm>
+            <a:off x="7677912" y="4169664"/>
             <a:ext cx="685800" cy="384048"/>
           </a:xfrm>
           <a:prstGeom prst="rect">
@@ -28176,73 +28503,7 @@
                 <a:ea typeface="Trebuchet MS" pitchFamily="34" charset="-122"/>
                 <a:cs typeface="Trebuchet MS" pitchFamily="34" charset="-120"/>
               </a:rPr>
-              <a:t>i</a:t>
-            </a:r>
-            <a:endParaRPr lang="en-US" sz="900" dirty="0"/>
-          </a:p>
-        </p:txBody>
-      </p:sp>
-      <p:sp>
-        <p:nvSpPr>
-          <p:cNvPr id="52" name="Shape 50"/>
-          <p:cNvSpPr/>
-          <p:nvPr/>
-        </p:nvSpPr>
-        <p:spPr>
-          <a:xfrm>
-            <a:off x="7576947" y="4169664"/>
-            <a:ext cx="685800" cy="384048"/>
-          </a:xfrm>
-          <a:prstGeom prst="rect">
-            <a:avLst>
-              <a:gd name="adj" fmla="val 9524"/>
-            </a:avLst>
-          </a:prstGeom>
-          <a:solidFill>
-            <a:srgbClr val="FFFFFF"/>
-          </a:solidFill>
-          <a:ln w="12700">
-            <a:solidFill>
-              <a:srgbClr val="DB2777"/>
-            </a:solidFill>
-            <a:prstDash val="solid"/>
-          </a:ln>
-        </p:spPr>
-      </p:sp>
-      <p:sp>
-        <p:nvSpPr>
-          <p:cNvPr id="53" name="Text 51"/>
-          <p:cNvSpPr/>
-          <p:nvPr/>
-        </p:nvSpPr>
-        <p:spPr>
-          <a:xfrm>
-            <a:off x="7576947" y="4169664"/>
-            <a:ext cx="685800" cy="384048"/>
-          </a:xfrm>
-          <a:prstGeom prst="rect">
-            <a:avLst/>
-          </a:prstGeom>
-          <a:noFill/>
-          <a:ln/>
-        </p:spPr>
-        <p:txBody>
-          <a:bodyPr wrap="square" lIns="0" tIns="0" rIns="0" bIns="0" rtlCol="0" anchor="ctr"/>
-          <a:lstStyle/>
-          <a:p>
-            <a:pPr algn="ctr" indent="0" marL="0">
-              <a:buNone/>
-            </a:pPr>
-            <a:r>
-              <a:rPr lang="en-US" sz="900" b="1" dirty="0">
-                <a:solidFill>
-                  <a:srgbClr val="9D174D"/>
-                </a:solidFill>
-                <a:latin typeface="Trebuchet MS" pitchFamily="34" charset="0"/>
-                <a:ea typeface="Trebuchet MS" pitchFamily="34" charset="-122"/>
-                <a:cs typeface="Trebuchet MS" pitchFamily="34" charset="-120"/>
-              </a:rPr>
-              <a:t>ng</a:t>
+              <a:t>n</a:t>
             </a:r>
             <a:endParaRPr lang="en-US" sz="900" dirty="0"/>
           </a:p>
@@ -28673,7 +28934,7 @@
                 <a:ea typeface="Trebuchet MS" pitchFamily="34" charset="-122"/>
                 <a:cs typeface="Trebuchet MS" pitchFamily="34" charset="-120"/>
               </a:rPr>
-              <a:t>reflect</a:t>
+              <a:t>reflective</a:t>
             </a:r>
             <a:endParaRPr lang="en-US" sz="2800" dirty="0"/>
           </a:p>
@@ -29500,7 +29761,7 @@
                 <a:ea typeface="Trebuchet MS" pitchFamily="34" charset="-122"/>
                 <a:cs typeface="Trebuchet MS" pitchFamily="34" charset="-120"/>
               </a:rPr>
-              <a:t>reflect</a:t>
+              <a:t>reflective</a:t>
             </a:r>
             <a:endParaRPr lang="en-US" sz="2800" dirty="0"/>
           </a:p>
@@ -29580,7 +29841,7 @@
         </p:nvSpPr>
         <p:spPr>
           <a:xfrm>
-            <a:off x="2938272" y="2258568"/>
+            <a:off x="2221992" y="2258568"/>
             <a:ext cx="1828800" cy="292608"/>
           </a:xfrm>
           <a:prstGeom prst="rect">
@@ -29614,7 +29875,7 @@
         </p:nvSpPr>
         <p:spPr>
           <a:xfrm>
-            <a:off x="2938272" y="2258568"/>
+            <a:off x="2221992" y="2258568"/>
             <a:ext cx="1828800" cy="292608"/>
           </a:xfrm>
           <a:prstGeom prst="rect">
@@ -29653,7 +29914,7 @@
         </p:nvSpPr>
         <p:spPr>
           <a:xfrm>
-            <a:off x="2938272" y="2569464"/>
+            <a:off x="2221992" y="2569464"/>
             <a:ext cx="1828800" cy="201168"/>
           </a:xfrm>
           <a:prstGeom prst="rect">
@@ -29692,7 +29953,7 @@
         </p:nvSpPr>
         <p:spPr>
           <a:xfrm>
-            <a:off x="5803392" y="2258568"/>
+            <a:off x="4370832" y="2258568"/>
             <a:ext cx="1828800" cy="292608"/>
           </a:xfrm>
           <a:prstGeom prst="rect">
@@ -29726,7 +29987,7 @@
         </p:nvSpPr>
         <p:spPr>
           <a:xfrm>
-            <a:off x="5803392" y="2258568"/>
+            <a:off x="4370832" y="2258568"/>
             <a:ext cx="1828800" cy="292608"/>
           </a:xfrm>
           <a:prstGeom prst="rect">
@@ -29765,7 +30026,7 @@
         </p:nvSpPr>
         <p:spPr>
           <a:xfrm>
-            <a:off x="5803392" y="2569464"/>
+            <a:off x="4370832" y="2569464"/>
             <a:ext cx="1828800" cy="201168"/>
           </a:xfrm>
           <a:prstGeom prst="rect">
@@ -29804,6 +30065,118 @@
         </p:nvSpPr>
         <p:spPr>
           <a:xfrm>
+            <a:off x="6519672" y="2258568"/>
+            <a:ext cx="1828800" cy="292608"/>
+          </a:xfrm>
+          <a:prstGeom prst="rect">
+            <a:avLst>
+              <a:gd name="adj" fmla="val 25000"/>
+            </a:avLst>
+          </a:prstGeom>
+          <a:solidFill>
+            <a:srgbClr val="FCE7F3"/>
+          </a:solidFill>
+          <a:ln w="19050">
+            <a:solidFill>
+              <a:srgbClr val="DB2777"/>
+            </a:solidFill>
+            <a:prstDash val="solid"/>
+          </a:ln>
+          <a:effectLst>
+            <a:outerShdw sx="100000" sy="100000" kx="0" ky="0" algn="bl" rotWithShape="0" blurRad="101600" dist="38100" dir="8100000">
+              <a:srgbClr val="000000">
+                <a:alpha val="12000"/>
+              </a:srgbClr>
+            </a:outerShdw>
+          </a:effectLst>
+        </p:spPr>
+      </p:sp>
+      <p:sp>
+        <p:nvSpPr>
+          <p:cNvPr id="23" name="Text 21"/>
+          <p:cNvSpPr/>
+          <p:nvPr/>
+        </p:nvSpPr>
+        <p:spPr>
+          <a:xfrm>
+            <a:off x="6519672" y="2258568"/>
+            <a:ext cx="1828800" cy="292608"/>
+          </a:xfrm>
+          <a:prstGeom prst="rect">
+            <a:avLst/>
+          </a:prstGeom>
+          <a:noFill/>
+          <a:ln/>
+        </p:spPr>
+        <p:txBody>
+          <a:bodyPr wrap="square" lIns="0" tIns="0" rIns="0" bIns="0" rtlCol="0" anchor="ctr"/>
+          <a:lstStyle/>
+          <a:p>
+            <a:pPr algn="ctr" indent="0" marL="0">
+              <a:buNone/>
+            </a:pPr>
+            <a:r>
+              <a:rPr lang="en-US" sz="1300" b="1" dirty="0">
+                <a:solidFill>
+                  <a:srgbClr val="9D174D"/>
+                </a:solidFill>
+                <a:latin typeface="Trebuchet MS" pitchFamily="34" charset="0"/>
+                <a:ea typeface="Trebuchet MS" pitchFamily="34" charset="-122"/>
+                <a:cs typeface="Trebuchet MS" pitchFamily="34" charset="-120"/>
+              </a:rPr>
+              <a:t>ive</a:t>
+            </a:r>
+            <a:endParaRPr lang="en-US" sz="1300" dirty="0"/>
+          </a:p>
+        </p:txBody>
+      </p:sp>
+      <p:sp>
+        <p:nvSpPr>
+          <p:cNvPr id="24" name="Text 22"/>
+          <p:cNvSpPr/>
+          <p:nvPr/>
+        </p:nvSpPr>
+        <p:spPr>
+          <a:xfrm>
+            <a:off x="6519672" y="2569464"/>
+            <a:ext cx="1828800" cy="201168"/>
+          </a:xfrm>
+          <a:prstGeom prst="rect">
+            <a:avLst/>
+          </a:prstGeom>
+          <a:noFill/>
+          <a:ln/>
+        </p:spPr>
+        <p:txBody>
+          <a:bodyPr wrap="square" lIns="0" tIns="0" rIns="0" bIns="0" rtlCol="0" anchor="t"/>
+          <a:lstStyle/>
+          <a:p>
+            <a:pPr algn="ctr" indent="0" marL="0">
+              <a:buNone/>
+            </a:pPr>
+            <a:r>
+              <a:rPr lang="en-US" sz="850" dirty="0">
+                <a:solidFill>
+                  <a:srgbClr val="475569"/>
+                </a:solidFill>
+                <a:latin typeface="Calibri" pitchFamily="34" charset="0"/>
+                <a:ea typeface="Calibri" pitchFamily="34" charset="-122"/>
+                <a:cs typeface="Calibri" pitchFamily="34" charset="-120"/>
+              </a:rPr>
+              <a:t>having the quality of</a:t>
+            </a:r>
+            <a:endParaRPr lang="en-US" sz="850" dirty="0"/>
+          </a:p>
+        </p:txBody>
+      </p:sp>
+      <p:sp>
+        <p:nvSpPr>
+          <p:cNvPr id="25" name="Shape 23"/>
+          <p:cNvSpPr/>
+          <p:nvPr/>
+        </p:nvSpPr>
+        <p:spPr>
+          <a:xfrm>
             <a:off x="365760" y="3273552"/>
             <a:ext cx="1371600" cy="658368"/>
           </a:xfrm>
@@ -29825,7 +30198,7 @@
       </p:sp>
       <p:sp>
         <p:nvSpPr>
-          <p:cNvPr id="23" name="Text 21"/>
+          <p:cNvPr id="26" name="Text 24"/>
           <p:cNvSpPr/>
           <p:nvPr/>
         </p:nvSpPr>
@@ -29864,7 +30237,7 @@
       </p:sp>
       <p:sp>
         <p:nvSpPr>
-          <p:cNvPr id="24" name="Shape 22"/>
+          <p:cNvPr id="27" name="Shape 25"/>
           <p:cNvSpPr/>
           <p:nvPr/>
         </p:nvSpPr>
@@ -29891,7 +30264,7 @@
       </p:sp>
       <p:sp>
         <p:nvSpPr>
-          <p:cNvPr id="25" name="Text 23"/>
+          <p:cNvPr id="28" name="Text 26"/>
           <p:cNvSpPr/>
           <p:nvPr/>
         </p:nvSpPr>
@@ -29930,7 +30303,7 @@
       </p:sp>
       <p:sp>
         <p:nvSpPr>
-          <p:cNvPr id="26" name="Shape 24"/>
+          <p:cNvPr id="29" name="Shape 27"/>
           <p:cNvSpPr/>
           <p:nvPr/>
         </p:nvSpPr>
@@ -29957,7 +30330,7 @@
       </p:sp>
       <p:sp>
         <p:nvSpPr>
-          <p:cNvPr id="27" name="Text 25"/>
+          <p:cNvPr id="30" name="Text 28"/>
           <p:cNvSpPr/>
           <p:nvPr/>
         </p:nvSpPr>
@@ -29996,7 +30369,7 @@
       </p:sp>
       <p:sp>
         <p:nvSpPr>
-          <p:cNvPr id="28" name="Shape 26"/>
+          <p:cNvPr id="31" name="Shape 29"/>
           <p:cNvSpPr/>
           <p:nvPr/>
         </p:nvSpPr>
@@ -30023,7 +30396,7 @@
       </p:sp>
       <p:sp>
         <p:nvSpPr>
-          <p:cNvPr id="29" name="Text 27"/>
+          <p:cNvPr id="32" name="Text 30"/>
           <p:cNvSpPr/>
           <p:nvPr/>
         </p:nvSpPr>
@@ -30485,7 +30858,7 @@
                 <a:ea typeface="Trebuchet MS" pitchFamily="34" charset="-122"/>
                 <a:cs typeface="Trebuchet MS" pitchFamily="34" charset="-120"/>
               </a:rPr>
-              <a:t>reflect</a:t>
+              <a:t>reflective</a:t>
             </a:r>
             <a:endParaRPr lang="en-US" sz="2800" dirty="0"/>
           </a:p>
@@ -30565,7 +30938,7 @@
         </p:nvSpPr>
         <p:spPr>
           <a:xfrm>
-            <a:off x="2938272" y="2258568"/>
+            <a:off x="2221992" y="2258568"/>
             <a:ext cx="1828800" cy="292608"/>
           </a:xfrm>
           <a:prstGeom prst="rect">
@@ -30599,7 +30972,7 @@
         </p:nvSpPr>
         <p:spPr>
           <a:xfrm>
-            <a:off x="2938272" y="2258568"/>
+            <a:off x="2221992" y="2258568"/>
             <a:ext cx="1828800" cy="292608"/>
           </a:xfrm>
           <a:prstGeom prst="rect">
@@ -30638,7 +31011,7 @@
         </p:nvSpPr>
         <p:spPr>
           <a:xfrm>
-            <a:off x="2938272" y="2569464"/>
+            <a:off x="2221992" y="2569464"/>
             <a:ext cx="1828800" cy="201168"/>
           </a:xfrm>
           <a:prstGeom prst="rect">
@@ -30677,7 +31050,7 @@
         </p:nvSpPr>
         <p:spPr>
           <a:xfrm>
-            <a:off x="5803392" y="2258568"/>
+            <a:off x="4370832" y="2258568"/>
             <a:ext cx="1828800" cy="292608"/>
           </a:xfrm>
           <a:prstGeom prst="rect">
@@ -30711,7 +31084,7 @@
         </p:nvSpPr>
         <p:spPr>
           <a:xfrm>
-            <a:off x="5803392" y="2258568"/>
+            <a:off x="4370832" y="2258568"/>
             <a:ext cx="1828800" cy="292608"/>
           </a:xfrm>
           <a:prstGeom prst="rect">
@@ -30750,7 +31123,7 @@
         </p:nvSpPr>
         <p:spPr>
           <a:xfrm>
-            <a:off x="5803392" y="2569464"/>
+            <a:off x="4370832" y="2569464"/>
             <a:ext cx="1828800" cy="201168"/>
           </a:xfrm>
           <a:prstGeom prst="rect">
@@ -30789,6 +31162,118 @@
         </p:nvSpPr>
         <p:spPr>
           <a:xfrm>
+            <a:off x="6519672" y="2258568"/>
+            <a:ext cx="1828800" cy="292608"/>
+          </a:xfrm>
+          <a:prstGeom prst="rect">
+            <a:avLst>
+              <a:gd name="adj" fmla="val 25000"/>
+            </a:avLst>
+          </a:prstGeom>
+          <a:solidFill>
+            <a:srgbClr val="FCE7F3"/>
+          </a:solidFill>
+          <a:ln w="19050">
+            <a:solidFill>
+              <a:srgbClr val="DB2777"/>
+            </a:solidFill>
+            <a:prstDash val="solid"/>
+          </a:ln>
+          <a:effectLst>
+            <a:outerShdw sx="100000" sy="100000" kx="0" ky="0" algn="bl" rotWithShape="0" blurRad="101600" dist="38100" dir="8100000">
+              <a:srgbClr val="000000">
+                <a:alpha val="12000"/>
+              </a:srgbClr>
+            </a:outerShdw>
+          </a:effectLst>
+        </p:spPr>
+      </p:sp>
+      <p:sp>
+        <p:nvSpPr>
+          <p:cNvPr id="23" name="Text 21"/>
+          <p:cNvSpPr/>
+          <p:nvPr/>
+        </p:nvSpPr>
+        <p:spPr>
+          <a:xfrm>
+            <a:off x="6519672" y="2258568"/>
+            <a:ext cx="1828800" cy="292608"/>
+          </a:xfrm>
+          <a:prstGeom prst="rect">
+            <a:avLst/>
+          </a:prstGeom>
+          <a:noFill/>
+          <a:ln/>
+        </p:spPr>
+        <p:txBody>
+          <a:bodyPr wrap="square" lIns="0" tIns="0" rIns="0" bIns="0" rtlCol="0" anchor="ctr"/>
+          <a:lstStyle/>
+          <a:p>
+            <a:pPr algn="ctr" indent="0" marL="0">
+              <a:buNone/>
+            </a:pPr>
+            <a:r>
+              <a:rPr lang="en-US" sz="1300" b="1" dirty="0">
+                <a:solidFill>
+                  <a:srgbClr val="9D174D"/>
+                </a:solidFill>
+                <a:latin typeface="Trebuchet MS" pitchFamily="34" charset="0"/>
+                <a:ea typeface="Trebuchet MS" pitchFamily="34" charset="-122"/>
+                <a:cs typeface="Trebuchet MS" pitchFamily="34" charset="-120"/>
+              </a:rPr>
+              <a:t>ive</a:t>
+            </a:r>
+            <a:endParaRPr lang="en-US" sz="1300" dirty="0"/>
+          </a:p>
+        </p:txBody>
+      </p:sp>
+      <p:sp>
+        <p:nvSpPr>
+          <p:cNvPr id="24" name="Text 22"/>
+          <p:cNvSpPr/>
+          <p:nvPr/>
+        </p:nvSpPr>
+        <p:spPr>
+          <a:xfrm>
+            <a:off x="6519672" y="2569464"/>
+            <a:ext cx="1828800" cy="201168"/>
+          </a:xfrm>
+          <a:prstGeom prst="rect">
+            <a:avLst/>
+          </a:prstGeom>
+          <a:noFill/>
+          <a:ln/>
+        </p:spPr>
+        <p:txBody>
+          <a:bodyPr wrap="square" lIns="0" tIns="0" rIns="0" bIns="0" rtlCol="0" anchor="t"/>
+          <a:lstStyle/>
+          <a:p>
+            <a:pPr algn="ctr" indent="0" marL="0">
+              <a:buNone/>
+            </a:pPr>
+            <a:r>
+              <a:rPr lang="en-US" sz="850" dirty="0">
+                <a:solidFill>
+                  <a:srgbClr val="475569"/>
+                </a:solidFill>
+                <a:latin typeface="Calibri" pitchFamily="34" charset="0"/>
+                <a:ea typeface="Calibri" pitchFamily="34" charset="-122"/>
+                <a:cs typeface="Calibri" pitchFamily="34" charset="-120"/>
+              </a:rPr>
+              <a:t>having the quality of</a:t>
+            </a:r>
+            <a:endParaRPr lang="en-US" sz="850" dirty="0"/>
+          </a:p>
+        </p:txBody>
+      </p:sp>
+      <p:sp>
+        <p:nvSpPr>
+          <p:cNvPr id="25" name="Shape 23"/>
+          <p:cNvSpPr/>
+          <p:nvPr/>
+        </p:nvSpPr>
+        <p:spPr>
+          <a:xfrm>
             <a:off x="365760" y="3273552"/>
             <a:ext cx="1371600" cy="658368"/>
           </a:xfrm>
@@ -30810,7 +31295,7 @@
       </p:sp>
       <p:sp>
         <p:nvSpPr>
-          <p:cNvPr id="23" name="Text 21"/>
+          <p:cNvPr id="26" name="Text 24"/>
           <p:cNvSpPr/>
           <p:nvPr/>
         </p:nvSpPr>
@@ -30849,7 +31334,7 @@
       </p:sp>
       <p:sp>
         <p:nvSpPr>
-          <p:cNvPr id="24" name="Shape 22"/>
+          <p:cNvPr id="27" name="Shape 25"/>
           <p:cNvSpPr/>
           <p:nvPr/>
         </p:nvSpPr>
@@ -30876,13 +31361,13 @@
       </p:sp>
       <p:sp>
         <p:nvSpPr>
-          <p:cNvPr id="25" name="Shape 23"/>
-          <p:cNvSpPr/>
-          <p:nvPr/>
-        </p:nvSpPr>
-        <p:spPr>
-          <a:xfrm>
-            <a:off x="2999232" y="3364992"/>
+          <p:cNvPr id="28" name="Shape 26"/>
+          <p:cNvSpPr/>
+          <p:nvPr/>
+        </p:nvSpPr>
+        <p:spPr>
+          <a:xfrm>
+            <a:off x="2313432" y="3364992"/>
             <a:ext cx="1645920" cy="475488"/>
           </a:xfrm>
           <a:prstGeom prst="rect">
@@ -30903,13 +31388,13 @@
       </p:sp>
       <p:sp>
         <p:nvSpPr>
-          <p:cNvPr id="26" name="Text 24"/>
-          <p:cNvSpPr/>
-          <p:nvPr/>
-        </p:nvSpPr>
-        <p:spPr>
-          <a:xfrm>
-            <a:off x="2999232" y="3364992"/>
+          <p:cNvPr id="29" name="Text 27"/>
+          <p:cNvSpPr/>
+          <p:nvPr/>
+        </p:nvSpPr>
+        <p:spPr>
+          <a:xfrm>
+            <a:off x="2313432" y="3364992"/>
             <a:ext cx="1645920" cy="475488"/>
           </a:xfrm>
           <a:prstGeom prst="rect">
@@ -30942,14 +31427,14 @@
       </p:sp>
       <p:sp>
         <p:nvSpPr>
-          <p:cNvPr id="27" name="Text 25"/>
-          <p:cNvSpPr/>
-          <p:nvPr/>
-        </p:nvSpPr>
-        <p:spPr>
-          <a:xfrm>
-            <a:off x="4645152" y="3364992"/>
-            <a:ext cx="1097280" cy="475488"/>
+          <p:cNvPr id="30" name="Text 28"/>
+          <p:cNvSpPr/>
+          <p:nvPr/>
+        </p:nvSpPr>
+        <p:spPr>
+          <a:xfrm>
+            <a:off x="3959352" y="3364992"/>
+            <a:ext cx="411480" cy="475488"/>
           </a:xfrm>
           <a:prstGeom prst="rect">
             <a:avLst/>
@@ -30981,13 +31466,13 @@
       </p:sp>
       <p:sp>
         <p:nvSpPr>
-          <p:cNvPr id="28" name="Shape 26"/>
-          <p:cNvSpPr/>
-          <p:nvPr/>
-        </p:nvSpPr>
-        <p:spPr>
-          <a:xfrm>
-            <a:off x="5742432" y="3364992"/>
+          <p:cNvPr id="31" name="Shape 29"/>
+          <p:cNvSpPr/>
+          <p:nvPr/>
+        </p:nvSpPr>
+        <p:spPr>
+          <a:xfrm>
+            <a:off x="4370832" y="3364992"/>
             <a:ext cx="1645920" cy="475488"/>
           </a:xfrm>
           <a:prstGeom prst="rect">
@@ -31008,13 +31493,13 @@
       </p:sp>
       <p:sp>
         <p:nvSpPr>
-          <p:cNvPr id="29" name="Text 27"/>
-          <p:cNvSpPr/>
-          <p:nvPr/>
-        </p:nvSpPr>
-        <p:spPr>
-          <a:xfrm>
-            <a:off x="5742432" y="3364992"/>
+          <p:cNvPr id="32" name="Text 30"/>
+          <p:cNvSpPr/>
+          <p:nvPr/>
+        </p:nvSpPr>
+        <p:spPr>
+          <a:xfrm>
+            <a:off x="4370832" y="3364992"/>
             <a:ext cx="1645920" cy="475488"/>
           </a:xfrm>
           <a:prstGeom prst="rect">
@@ -31039,7 +31524,7 @@
                 <a:ea typeface="Trebuchet MS" pitchFamily="34" charset="-122"/>
                 <a:cs typeface="Trebuchet MS" pitchFamily="34" charset="-120"/>
               </a:rPr>
-              <a:t>flect</a:t>
+              <a:t>flec</a:t>
             </a:r>
             <a:endParaRPr lang="en-US" sz="1400" dirty="0"/>
           </a:p>
@@ -31047,7 +31532,112 @@
       </p:sp>
       <p:sp>
         <p:nvSpPr>
-          <p:cNvPr id="30" name="Shape 28"/>
+          <p:cNvPr id="33" name="Text 31"/>
+          <p:cNvSpPr/>
+          <p:nvPr/>
+        </p:nvSpPr>
+        <p:spPr>
+          <a:xfrm>
+            <a:off x="6016752" y="3364992"/>
+            <a:ext cx="411480" cy="475488"/>
+          </a:xfrm>
+          <a:prstGeom prst="rect">
+            <a:avLst/>
+          </a:prstGeom>
+          <a:noFill/>
+          <a:ln/>
+        </p:spPr>
+        <p:txBody>
+          <a:bodyPr wrap="square" lIns="0" tIns="0" rIns="0" bIns="0" rtlCol="0" anchor="ctr"/>
+          <a:lstStyle/>
+          <a:p>
+            <a:pPr algn="ctr" indent="0" marL="0">
+              <a:buNone/>
+            </a:pPr>
+            <a:r>
+              <a:rPr lang="en-US" sz="1600" b="1" dirty="0">
+                <a:solidFill>
+                  <a:srgbClr val="0D9488"/>
+                </a:solidFill>
+                <a:latin typeface="Trebuchet MS" pitchFamily="34" charset="0"/>
+                <a:ea typeface="Trebuchet MS" pitchFamily="34" charset="-122"/>
+                <a:cs typeface="Trebuchet MS" pitchFamily="34" charset="-120"/>
+              </a:rPr>
+              <a:t>·</a:t>
+            </a:r>
+            <a:endParaRPr lang="en-US" sz="1600" dirty="0"/>
+          </a:p>
+        </p:txBody>
+      </p:sp>
+      <p:sp>
+        <p:nvSpPr>
+          <p:cNvPr id="34" name="Shape 32"/>
+          <p:cNvSpPr/>
+          <p:nvPr/>
+        </p:nvSpPr>
+        <p:spPr>
+          <a:xfrm>
+            <a:off x="6428232" y="3364992"/>
+            <a:ext cx="1645920" cy="475488"/>
+          </a:xfrm>
+          <a:prstGeom prst="rect">
+            <a:avLst>
+              <a:gd name="adj" fmla="val 9615"/>
+            </a:avLst>
+          </a:prstGeom>
+          <a:solidFill>
+            <a:srgbClr val="FFFFFF"/>
+          </a:solidFill>
+          <a:ln w="12700">
+            <a:solidFill>
+              <a:srgbClr val="0D9488"/>
+            </a:solidFill>
+            <a:prstDash val="solid"/>
+          </a:ln>
+        </p:spPr>
+      </p:sp>
+      <p:sp>
+        <p:nvSpPr>
+          <p:cNvPr id="35" name="Text 33"/>
+          <p:cNvSpPr/>
+          <p:nvPr/>
+        </p:nvSpPr>
+        <p:spPr>
+          <a:xfrm>
+            <a:off x="6428232" y="3364992"/>
+            <a:ext cx="1645920" cy="475488"/>
+          </a:xfrm>
+          <a:prstGeom prst="rect">
+            <a:avLst/>
+          </a:prstGeom>
+          <a:noFill/>
+          <a:ln/>
+        </p:spPr>
+        <p:txBody>
+          <a:bodyPr wrap="square" lIns="0" tIns="0" rIns="0" bIns="0" rtlCol="0" anchor="ctr"/>
+          <a:lstStyle/>
+          <a:p>
+            <a:pPr algn="ctr" indent="0" marL="0">
+              <a:buNone/>
+            </a:pPr>
+            <a:r>
+              <a:rPr lang="en-US" sz="1400" b="1" dirty="0">
+                <a:solidFill>
+                  <a:srgbClr val="0D9488"/>
+                </a:solidFill>
+                <a:latin typeface="Trebuchet MS" pitchFamily="34" charset="0"/>
+                <a:ea typeface="Trebuchet MS" pitchFamily="34" charset="-122"/>
+                <a:cs typeface="Trebuchet MS" pitchFamily="34" charset="-120"/>
+              </a:rPr>
+              <a:t>tive</a:t>
+            </a:r>
+            <a:endParaRPr lang="en-US" sz="1400" dirty="0"/>
+          </a:p>
+        </p:txBody>
+      </p:sp>
+      <p:sp>
+        <p:nvSpPr>
+          <p:cNvPr id="36" name="Shape 34"/>
           <p:cNvSpPr/>
           <p:nvPr/>
         </p:nvSpPr>
@@ -31074,7 +31664,7 @@
       </p:sp>
       <p:sp>
         <p:nvSpPr>
-          <p:cNvPr id="31" name="Text 29"/>
+          <p:cNvPr id="37" name="Text 35"/>
           <p:cNvSpPr/>
           <p:nvPr/>
         </p:nvSpPr>
@@ -31113,7 +31703,7 @@
       </p:sp>
       <p:sp>
         <p:nvSpPr>
-          <p:cNvPr id="32" name="Shape 30"/>
+          <p:cNvPr id="38" name="Shape 36"/>
           <p:cNvSpPr/>
           <p:nvPr/>
         </p:nvSpPr>
@@ -31140,7 +31730,7 @@
       </p:sp>
       <p:sp>
         <p:nvSpPr>
-          <p:cNvPr id="33" name="Text 31"/>
+          <p:cNvPr id="39" name="Text 37"/>
           <p:cNvSpPr/>
           <p:nvPr/>
         </p:nvSpPr>
@@ -31602,7 +32192,7 @@
                 <a:ea typeface="Trebuchet MS" pitchFamily="34" charset="-122"/>
                 <a:cs typeface="Trebuchet MS" pitchFamily="34" charset="-120"/>
               </a:rPr>
-              <a:t>reflect</a:t>
+              <a:t>reflective</a:t>
             </a:r>
             <a:endParaRPr lang="en-US" sz="2800" dirty="0"/>
           </a:p>
@@ -31682,7 +32272,7 @@
         </p:nvSpPr>
         <p:spPr>
           <a:xfrm>
-            <a:off x="2938272" y="2258568"/>
+            <a:off x="2221992" y="2258568"/>
             <a:ext cx="1828800" cy="292608"/>
           </a:xfrm>
           <a:prstGeom prst="rect">
@@ -31716,7 +32306,7 @@
         </p:nvSpPr>
         <p:spPr>
           <a:xfrm>
-            <a:off x="2938272" y="2258568"/>
+            <a:off x="2221992" y="2258568"/>
             <a:ext cx="1828800" cy="292608"/>
           </a:xfrm>
           <a:prstGeom prst="rect">
@@ -31755,7 +32345,7 @@
         </p:nvSpPr>
         <p:spPr>
           <a:xfrm>
-            <a:off x="2938272" y="2569464"/>
+            <a:off x="2221992" y="2569464"/>
             <a:ext cx="1828800" cy="201168"/>
           </a:xfrm>
           <a:prstGeom prst="rect">
@@ -31794,7 +32384,7 @@
         </p:nvSpPr>
         <p:spPr>
           <a:xfrm>
-            <a:off x="5803392" y="2258568"/>
+            <a:off x="4370832" y="2258568"/>
             <a:ext cx="1828800" cy="292608"/>
           </a:xfrm>
           <a:prstGeom prst="rect">
@@ -31828,7 +32418,7 @@
         </p:nvSpPr>
         <p:spPr>
           <a:xfrm>
-            <a:off x="5803392" y="2258568"/>
+            <a:off x="4370832" y="2258568"/>
             <a:ext cx="1828800" cy="292608"/>
           </a:xfrm>
           <a:prstGeom prst="rect">
@@ -31867,7 +32457,7 @@
         </p:nvSpPr>
         <p:spPr>
           <a:xfrm>
-            <a:off x="5803392" y="2569464"/>
+            <a:off x="4370832" y="2569464"/>
             <a:ext cx="1828800" cy="201168"/>
           </a:xfrm>
           <a:prstGeom prst="rect">
@@ -31906,6 +32496,118 @@
         </p:nvSpPr>
         <p:spPr>
           <a:xfrm>
+            <a:off x="6519672" y="2258568"/>
+            <a:ext cx="1828800" cy="292608"/>
+          </a:xfrm>
+          <a:prstGeom prst="rect">
+            <a:avLst>
+              <a:gd name="adj" fmla="val 25000"/>
+            </a:avLst>
+          </a:prstGeom>
+          <a:solidFill>
+            <a:srgbClr val="FCE7F3"/>
+          </a:solidFill>
+          <a:ln w="19050">
+            <a:solidFill>
+              <a:srgbClr val="DB2777"/>
+            </a:solidFill>
+            <a:prstDash val="solid"/>
+          </a:ln>
+          <a:effectLst>
+            <a:outerShdw sx="100000" sy="100000" kx="0" ky="0" algn="bl" rotWithShape="0" blurRad="101600" dist="38100" dir="8100000">
+              <a:srgbClr val="000000">
+                <a:alpha val="12000"/>
+              </a:srgbClr>
+            </a:outerShdw>
+          </a:effectLst>
+        </p:spPr>
+      </p:sp>
+      <p:sp>
+        <p:nvSpPr>
+          <p:cNvPr id="23" name="Text 21"/>
+          <p:cNvSpPr/>
+          <p:nvPr/>
+        </p:nvSpPr>
+        <p:spPr>
+          <a:xfrm>
+            <a:off x="6519672" y="2258568"/>
+            <a:ext cx="1828800" cy="292608"/>
+          </a:xfrm>
+          <a:prstGeom prst="rect">
+            <a:avLst/>
+          </a:prstGeom>
+          <a:noFill/>
+          <a:ln/>
+        </p:spPr>
+        <p:txBody>
+          <a:bodyPr wrap="square" lIns="0" tIns="0" rIns="0" bIns="0" rtlCol="0" anchor="ctr"/>
+          <a:lstStyle/>
+          <a:p>
+            <a:pPr algn="ctr" indent="0" marL="0">
+              <a:buNone/>
+            </a:pPr>
+            <a:r>
+              <a:rPr lang="en-US" sz="1300" b="1" dirty="0">
+                <a:solidFill>
+                  <a:srgbClr val="9D174D"/>
+                </a:solidFill>
+                <a:latin typeface="Trebuchet MS" pitchFamily="34" charset="0"/>
+                <a:ea typeface="Trebuchet MS" pitchFamily="34" charset="-122"/>
+                <a:cs typeface="Trebuchet MS" pitchFamily="34" charset="-120"/>
+              </a:rPr>
+              <a:t>ive</a:t>
+            </a:r>
+            <a:endParaRPr lang="en-US" sz="1300" dirty="0"/>
+          </a:p>
+        </p:txBody>
+      </p:sp>
+      <p:sp>
+        <p:nvSpPr>
+          <p:cNvPr id="24" name="Text 22"/>
+          <p:cNvSpPr/>
+          <p:nvPr/>
+        </p:nvSpPr>
+        <p:spPr>
+          <a:xfrm>
+            <a:off x="6519672" y="2569464"/>
+            <a:ext cx="1828800" cy="201168"/>
+          </a:xfrm>
+          <a:prstGeom prst="rect">
+            <a:avLst/>
+          </a:prstGeom>
+          <a:noFill/>
+          <a:ln/>
+        </p:spPr>
+        <p:txBody>
+          <a:bodyPr wrap="square" lIns="0" tIns="0" rIns="0" bIns="0" rtlCol="0" anchor="t"/>
+          <a:lstStyle/>
+          <a:p>
+            <a:pPr algn="ctr" indent="0" marL="0">
+              <a:buNone/>
+            </a:pPr>
+            <a:r>
+              <a:rPr lang="en-US" sz="850" dirty="0">
+                <a:solidFill>
+                  <a:srgbClr val="475569"/>
+                </a:solidFill>
+                <a:latin typeface="Calibri" pitchFamily="34" charset="0"/>
+                <a:ea typeface="Calibri" pitchFamily="34" charset="-122"/>
+                <a:cs typeface="Calibri" pitchFamily="34" charset="-120"/>
+              </a:rPr>
+              <a:t>having the quality of</a:t>
+            </a:r>
+            <a:endParaRPr lang="en-US" sz="850" dirty="0"/>
+          </a:p>
+        </p:txBody>
+      </p:sp>
+      <p:sp>
+        <p:nvSpPr>
+          <p:cNvPr id="25" name="Shape 23"/>
+          <p:cNvSpPr/>
+          <p:nvPr/>
+        </p:nvSpPr>
+        <p:spPr>
+          <a:xfrm>
             <a:off x="365760" y="3273552"/>
             <a:ext cx="1371600" cy="658368"/>
           </a:xfrm>
@@ -31927,7 +32629,7 @@
       </p:sp>
       <p:sp>
         <p:nvSpPr>
-          <p:cNvPr id="23" name="Text 21"/>
+          <p:cNvPr id="26" name="Text 24"/>
           <p:cNvSpPr/>
           <p:nvPr/>
         </p:nvSpPr>
@@ -31966,7 +32668,7 @@
       </p:sp>
       <p:sp>
         <p:nvSpPr>
-          <p:cNvPr id="24" name="Shape 22"/>
+          <p:cNvPr id="27" name="Shape 25"/>
           <p:cNvSpPr/>
           <p:nvPr/>
         </p:nvSpPr>
@@ -31993,13 +32695,13 @@
       </p:sp>
       <p:sp>
         <p:nvSpPr>
-          <p:cNvPr id="25" name="Shape 23"/>
-          <p:cNvSpPr/>
-          <p:nvPr/>
-        </p:nvSpPr>
-        <p:spPr>
-          <a:xfrm>
-            <a:off x="2999232" y="3364992"/>
+          <p:cNvPr id="28" name="Shape 26"/>
+          <p:cNvSpPr/>
+          <p:nvPr/>
+        </p:nvSpPr>
+        <p:spPr>
+          <a:xfrm>
+            <a:off x="2313432" y="3364992"/>
             <a:ext cx="1645920" cy="475488"/>
           </a:xfrm>
           <a:prstGeom prst="rect">
@@ -32020,13 +32722,13 @@
       </p:sp>
       <p:sp>
         <p:nvSpPr>
-          <p:cNvPr id="26" name="Text 24"/>
-          <p:cNvSpPr/>
-          <p:nvPr/>
-        </p:nvSpPr>
-        <p:spPr>
-          <a:xfrm>
-            <a:off x="2999232" y="3364992"/>
+          <p:cNvPr id="29" name="Text 27"/>
+          <p:cNvSpPr/>
+          <p:nvPr/>
+        </p:nvSpPr>
+        <p:spPr>
+          <a:xfrm>
+            <a:off x="2313432" y="3364992"/>
             <a:ext cx="1645920" cy="475488"/>
           </a:xfrm>
           <a:prstGeom prst="rect">
@@ -32059,14 +32761,14 @@
       </p:sp>
       <p:sp>
         <p:nvSpPr>
-          <p:cNvPr id="27" name="Text 25"/>
-          <p:cNvSpPr/>
-          <p:nvPr/>
-        </p:nvSpPr>
-        <p:spPr>
-          <a:xfrm>
-            <a:off x="4645152" y="3364992"/>
-            <a:ext cx="1097280" cy="475488"/>
+          <p:cNvPr id="30" name="Text 28"/>
+          <p:cNvSpPr/>
+          <p:nvPr/>
+        </p:nvSpPr>
+        <p:spPr>
+          <a:xfrm>
+            <a:off x="3959352" y="3364992"/>
+            <a:ext cx="411480" cy="475488"/>
           </a:xfrm>
           <a:prstGeom prst="rect">
             <a:avLst/>
@@ -32098,13 +32800,13 @@
       </p:sp>
       <p:sp>
         <p:nvSpPr>
-          <p:cNvPr id="28" name="Shape 26"/>
-          <p:cNvSpPr/>
-          <p:nvPr/>
-        </p:nvSpPr>
-        <p:spPr>
-          <a:xfrm>
-            <a:off x="5742432" y="3364992"/>
+          <p:cNvPr id="31" name="Shape 29"/>
+          <p:cNvSpPr/>
+          <p:nvPr/>
+        </p:nvSpPr>
+        <p:spPr>
+          <a:xfrm>
+            <a:off x="4370832" y="3364992"/>
             <a:ext cx="1645920" cy="475488"/>
           </a:xfrm>
           <a:prstGeom prst="rect">
@@ -32125,13 +32827,13 @@
       </p:sp>
       <p:sp>
         <p:nvSpPr>
-          <p:cNvPr id="29" name="Text 27"/>
-          <p:cNvSpPr/>
-          <p:nvPr/>
-        </p:nvSpPr>
-        <p:spPr>
-          <a:xfrm>
-            <a:off x="5742432" y="3364992"/>
+          <p:cNvPr id="32" name="Text 30"/>
+          <p:cNvSpPr/>
+          <p:nvPr/>
+        </p:nvSpPr>
+        <p:spPr>
+          <a:xfrm>
+            <a:off x="4370832" y="3364992"/>
             <a:ext cx="1645920" cy="475488"/>
           </a:xfrm>
           <a:prstGeom prst="rect">
@@ -32156,7 +32858,7 @@
                 <a:ea typeface="Trebuchet MS" pitchFamily="34" charset="-122"/>
                 <a:cs typeface="Trebuchet MS" pitchFamily="34" charset="-120"/>
               </a:rPr>
-              <a:t>flect</a:t>
+              <a:t>flec</a:t>
             </a:r>
             <a:endParaRPr lang="en-US" sz="1400" dirty="0"/>
           </a:p>
@@ -32164,7 +32866,112 @@
       </p:sp>
       <p:sp>
         <p:nvSpPr>
-          <p:cNvPr id="30" name="Shape 28"/>
+          <p:cNvPr id="33" name="Text 31"/>
+          <p:cNvSpPr/>
+          <p:nvPr/>
+        </p:nvSpPr>
+        <p:spPr>
+          <a:xfrm>
+            <a:off x="6016752" y="3364992"/>
+            <a:ext cx="411480" cy="475488"/>
+          </a:xfrm>
+          <a:prstGeom prst="rect">
+            <a:avLst/>
+          </a:prstGeom>
+          <a:noFill/>
+          <a:ln/>
+        </p:spPr>
+        <p:txBody>
+          <a:bodyPr wrap="square" lIns="0" tIns="0" rIns="0" bIns="0" rtlCol="0" anchor="ctr"/>
+          <a:lstStyle/>
+          <a:p>
+            <a:pPr algn="ctr" indent="0" marL="0">
+              <a:buNone/>
+            </a:pPr>
+            <a:r>
+              <a:rPr lang="en-US" sz="1600" b="1" dirty="0">
+                <a:solidFill>
+                  <a:srgbClr val="0D9488"/>
+                </a:solidFill>
+                <a:latin typeface="Trebuchet MS" pitchFamily="34" charset="0"/>
+                <a:ea typeface="Trebuchet MS" pitchFamily="34" charset="-122"/>
+                <a:cs typeface="Trebuchet MS" pitchFamily="34" charset="-120"/>
+              </a:rPr>
+              <a:t>·</a:t>
+            </a:r>
+            <a:endParaRPr lang="en-US" sz="1600" dirty="0"/>
+          </a:p>
+        </p:txBody>
+      </p:sp>
+      <p:sp>
+        <p:nvSpPr>
+          <p:cNvPr id="34" name="Shape 32"/>
+          <p:cNvSpPr/>
+          <p:nvPr/>
+        </p:nvSpPr>
+        <p:spPr>
+          <a:xfrm>
+            <a:off x="6428232" y="3364992"/>
+            <a:ext cx="1645920" cy="475488"/>
+          </a:xfrm>
+          <a:prstGeom prst="rect">
+            <a:avLst>
+              <a:gd name="adj" fmla="val 9615"/>
+            </a:avLst>
+          </a:prstGeom>
+          <a:solidFill>
+            <a:srgbClr val="FFFFFF"/>
+          </a:solidFill>
+          <a:ln w="12700">
+            <a:solidFill>
+              <a:srgbClr val="0D9488"/>
+            </a:solidFill>
+            <a:prstDash val="solid"/>
+          </a:ln>
+        </p:spPr>
+      </p:sp>
+      <p:sp>
+        <p:nvSpPr>
+          <p:cNvPr id="35" name="Text 33"/>
+          <p:cNvSpPr/>
+          <p:nvPr/>
+        </p:nvSpPr>
+        <p:spPr>
+          <a:xfrm>
+            <a:off x="6428232" y="3364992"/>
+            <a:ext cx="1645920" cy="475488"/>
+          </a:xfrm>
+          <a:prstGeom prst="rect">
+            <a:avLst/>
+          </a:prstGeom>
+          <a:noFill/>
+          <a:ln/>
+        </p:spPr>
+        <p:txBody>
+          <a:bodyPr wrap="square" lIns="0" tIns="0" rIns="0" bIns="0" rtlCol="0" anchor="ctr"/>
+          <a:lstStyle/>
+          <a:p>
+            <a:pPr algn="ctr" indent="0" marL="0">
+              <a:buNone/>
+            </a:pPr>
+            <a:r>
+              <a:rPr lang="en-US" sz="1400" b="1" dirty="0">
+                <a:solidFill>
+                  <a:srgbClr val="0D9488"/>
+                </a:solidFill>
+                <a:latin typeface="Trebuchet MS" pitchFamily="34" charset="0"/>
+                <a:ea typeface="Trebuchet MS" pitchFamily="34" charset="-122"/>
+                <a:cs typeface="Trebuchet MS" pitchFamily="34" charset="-120"/>
+              </a:rPr>
+              <a:t>tive</a:t>
+            </a:r>
+            <a:endParaRPr lang="en-US" sz="1400" dirty="0"/>
+          </a:p>
+        </p:txBody>
+      </p:sp>
+      <p:sp>
+        <p:nvSpPr>
+          <p:cNvPr id="36" name="Shape 34"/>
           <p:cNvSpPr/>
           <p:nvPr/>
         </p:nvSpPr>
@@ -32191,7 +32998,7 @@
       </p:sp>
       <p:sp>
         <p:nvSpPr>
-          <p:cNvPr id="31" name="Text 29"/>
+          <p:cNvPr id="37" name="Text 35"/>
           <p:cNvSpPr/>
           <p:nvPr/>
         </p:nvSpPr>
@@ -32230,18 +33037,18 @@
       </p:sp>
       <p:sp>
         <p:nvSpPr>
-          <p:cNvPr id="32" name="Shape 30"/>
+          <p:cNvPr id="38" name="Shape 36"/>
           <p:cNvSpPr/>
           <p:nvPr/>
         </p:nvSpPr>
         <p:spPr>
           <a:xfrm>
             <a:off x="1874520" y="4096512"/>
-            <a:ext cx="6903720" cy="804672"/>
+            <a:ext cx="6903720" cy="658368"/>
           </a:xfrm>
           <a:prstGeom prst="rect">
             <a:avLst>
-              <a:gd name="adj" fmla="val 6818"/>
+              <a:gd name="adj" fmla="val 8333"/>
             </a:avLst>
           </a:prstGeom>
           <a:solidFill>
@@ -32257,18 +33064,18 @@
       </p:sp>
       <p:sp>
         <p:nvSpPr>
-          <p:cNvPr id="33" name="Shape 31"/>
-          <p:cNvSpPr/>
-          <p:nvPr/>
-        </p:nvSpPr>
-        <p:spPr>
-          <a:xfrm>
-            <a:off x="2427732" y="4169664"/>
-            <a:ext cx="685800" cy="384048"/>
+          <p:cNvPr id="39" name="Shape 37"/>
+          <p:cNvSpPr/>
+          <p:nvPr/>
+        </p:nvSpPr>
+        <p:spPr>
+          <a:xfrm>
+            <a:off x="2023872" y="4169664"/>
+            <a:ext cx="685800" cy="475488"/>
           </a:xfrm>
           <a:prstGeom prst="rect">
             <a:avLst>
-              <a:gd name="adj" fmla="val 9524"/>
+              <a:gd name="adj" fmla="val 7692"/>
             </a:avLst>
           </a:prstGeom>
           <a:solidFill>
@@ -32284,14 +33091,14 @@
       </p:sp>
       <p:sp>
         <p:nvSpPr>
-          <p:cNvPr id="34" name="Text 32"/>
-          <p:cNvSpPr/>
-          <p:nvPr/>
-        </p:nvSpPr>
-        <p:spPr>
-          <a:xfrm>
-            <a:off x="2427732" y="4169664"/>
-            <a:ext cx="685800" cy="384048"/>
+          <p:cNvPr id="40" name="Text 38"/>
+          <p:cNvSpPr/>
+          <p:nvPr/>
+        </p:nvSpPr>
+        <p:spPr>
+          <a:xfrm>
+            <a:off x="2023872" y="4169664"/>
+            <a:ext cx="685800" cy="475488"/>
           </a:xfrm>
           <a:prstGeom prst="rect">
             <a:avLst/>
@@ -32323,18 +33130,18 @@
       </p:sp>
       <p:sp>
         <p:nvSpPr>
-          <p:cNvPr id="35" name="Shape 33"/>
-          <p:cNvSpPr/>
-          <p:nvPr/>
-        </p:nvSpPr>
-        <p:spPr>
-          <a:xfrm>
-            <a:off x="3639312" y="4169664"/>
-            <a:ext cx="685800" cy="384048"/>
+          <p:cNvPr id="41" name="Shape 39"/>
+          <p:cNvSpPr/>
+          <p:nvPr/>
+        </p:nvSpPr>
+        <p:spPr>
+          <a:xfrm>
+            <a:off x="2831592" y="4169664"/>
+            <a:ext cx="685800" cy="475488"/>
           </a:xfrm>
           <a:prstGeom prst="rect">
             <a:avLst>
-              <a:gd name="adj" fmla="val 9524"/>
+              <a:gd name="adj" fmla="val 7692"/>
             </a:avLst>
           </a:prstGeom>
           <a:solidFill>
@@ -32350,14 +33157,14 @@
       </p:sp>
       <p:sp>
         <p:nvSpPr>
-          <p:cNvPr id="36" name="Text 34"/>
-          <p:cNvSpPr/>
-          <p:nvPr/>
-        </p:nvSpPr>
-        <p:spPr>
-          <a:xfrm>
-            <a:off x="3639312" y="4169664"/>
-            <a:ext cx="685800" cy="384048"/>
+          <p:cNvPr id="42" name="Text 40"/>
+          <p:cNvSpPr/>
+          <p:nvPr/>
+        </p:nvSpPr>
+        <p:spPr>
+          <a:xfrm>
+            <a:off x="2831592" y="4169664"/>
+            <a:ext cx="685800" cy="475488"/>
           </a:xfrm>
           <a:prstGeom prst="rect">
             <a:avLst/>
@@ -32389,18 +33196,18 @@
       </p:sp>
       <p:sp>
         <p:nvSpPr>
-          <p:cNvPr id="37" name="Shape 35"/>
-          <p:cNvSpPr/>
-          <p:nvPr/>
-        </p:nvSpPr>
-        <p:spPr>
-          <a:xfrm>
-            <a:off x="4850892" y="4169664"/>
-            <a:ext cx="685800" cy="384048"/>
+          <p:cNvPr id="43" name="Shape 41"/>
+          <p:cNvSpPr/>
+          <p:nvPr/>
+        </p:nvSpPr>
+        <p:spPr>
+          <a:xfrm>
+            <a:off x="3639312" y="4169664"/>
+            <a:ext cx="685800" cy="475488"/>
           </a:xfrm>
           <a:prstGeom prst="rect">
             <a:avLst>
-              <a:gd name="adj" fmla="val 9524"/>
+              <a:gd name="adj" fmla="val 7692"/>
             </a:avLst>
           </a:prstGeom>
           <a:solidFill>
@@ -32416,14 +33223,14 @@
       </p:sp>
       <p:sp>
         <p:nvSpPr>
-          <p:cNvPr id="38" name="Text 36"/>
-          <p:cNvSpPr/>
-          <p:nvPr/>
-        </p:nvSpPr>
-        <p:spPr>
-          <a:xfrm>
-            <a:off x="4850892" y="4169664"/>
-            <a:ext cx="685800" cy="384048"/>
+          <p:cNvPr id="44" name="Text 42"/>
+          <p:cNvSpPr/>
+          <p:nvPr/>
+        </p:nvSpPr>
+        <p:spPr>
+          <a:xfrm>
+            <a:off x="3639312" y="4169664"/>
+            <a:ext cx="685800" cy="475488"/>
           </a:xfrm>
           <a:prstGeom prst="rect">
             <a:avLst/>
@@ -32455,18 +33262,18 @@
       </p:sp>
       <p:sp>
         <p:nvSpPr>
-          <p:cNvPr id="39" name="Shape 37"/>
-          <p:cNvSpPr/>
-          <p:nvPr/>
-        </p:nvSpPr>
-        <p:spPr>
-          <a:xfrm>
-            <a:off x="6062472" y="4169664"/>
-            <a:ext cx="685800" cy="384048"/>
+          <p:cNvPr id="45" name="Shape 43"/>
+          <p:cNvSpPr/>
+          <p:nvPr/>
+        </p:nvSpPr>
+        <p:spPr>
+          <a:xfrm>
+            <a:off x="4447032" y="4169664"/>
+            <a:ext cx="685800" cy="475488"/>
           </a:xfrm>
           <a:prstGeom prst="rect">
             <a:avLst>
-              <a:gd name="adj" fmla="val 9524"/>
+              <a:gd name="adj" fmla="val 7692"/>
             </a:avLst>
           </a:prstGeom>
           <a:solidFill>
@@ -32482,14 +33289,14 @@
       </p:sp>
       <p:sp>
         <p:nvSpPr>
-          <p:cNvPr id="40" name="Text 38"/>
-          <p:cNvSpPr/>
-          <p:nvPr/>
-        </p:nvSpPr>
-        <p:spPr>
-          <a:xfrm>
-            <a:off x="6062472" y="4169664"/>
-            <a:ext cx="685800" cy="384048"/>
+          <p:cNvPr id="46" name="Text 44"/>
+          <p:cNvSpPr/>
+          <p:nvPr/>
+        </p:nvSpPr>
+        <p:spPr>
+          <a:xfrm>
+            <a:off x="4447032" y="4169664"/>
+            <a:ext cx="685800" cy="475488"/>
           </a:xfrm>
           <a:prstGeom prst="rect">
             <a:avLst/>
@@ -32521,18 +33328,18 @@
       </p:sp>
       <p:sp>
         <p:nvSpPr>
-          <p:cNvPr id="41" name="Shape 39"/>
-          <p:cNvSpPr/>
-          <p:nvPr/>
-        </p:nvSpPr>
-        <p:spPr>
-          <a:xfrm>
-            <a:off x="7274052" y="4169664"/>
-            <a:ext cx="685800" cy="384048"/>
+          <p:cNvPr id="47" name="Shape 45"/>
+          <p:cNvSpPr/>
+          <p:nvPr/>
+        </p:nvSpPr>
+        <p:spPr>
+          <a:xfrm>
+            <a:off x="5254752" y="4169664"/>
+            <a:ext cx="685800" cy="475488"/>
           </a:xfrm>
           <a:prstGeom prst="rect">
             <a:avLst>
-              <a:gd name="adj" fmla="val 9524"/>
+              <a:gd name="adj" fmla="val 7692"/>
             </a:avLst>
           </a:prstGeom>
           <a:solidFill>
@@ -32548,14 +33355,14 @@
       </p:sp>
       <p:sp>
         <p:nvSpPr>
-          <p:cNvPr id="42" name="Text 40"/>
-          <p:cNvSpPr/>
-          <p:nvPr/>
-        </p:nvSpPr>
-        <p:spPr>
-          <a:xfrm>
-            <a:off x="7274052" y="4169664"/>
-            <a:ext cx="685800" cy="384048"/>
+          <p:cNvPr id="48" name="Text 46"/>
+          <p:cNvSpPr/>
+          <p:nvPr/>
+        </p:nvSpPr>
+        <p:spPr>
+          <a:xfrm>
+            <a:off x="5254752" y="4169664"/>
+            <a:ext cx="685800" cy="475488"/>
           </a:xfrm>
           <a:prstGeom prst="rect">
             <a:avLst/>
@@ -32579,7 +33386,7 @@
                 <a:ea typeface="Trebuchet MS" pitchFamily="34" charset="-122"/>
                 <a:cs typeface="Trebuchet MS" pitchFamily="34" charset="-120"/>
               </a:rPr>
-              <a:t>ct</a:t>
+              <a:t>c</a:t>
             </a:r>
             <a:endParaRPr lang="en-US" sz="900" dirty="0"/>
           </a:p>
@@ -32587,40 +33394,199 @@
       </p:sp>
       <p:sp>
         <p:nvSpPr>
-          <p:cNvPr id="43" name="Text 41"/>
-          <p:cNvSpPr/>
-          <p:nvPr/>
-        </p:nvSpPr>
-        <p:spPr>
-          <a:xfrm>
-            <a:off x="7274052" y="4572000"/>
-            <a:ext cx="685800" cy="219456"/>
-          </a:xfrm>
-          <a:prstGeom prst="rect">
-            <a:avLst/>
-          </a:prstGeom>
-          <a:noFill/>
-          <a:ln/>
-        </p:spPr>
-        <p:txBody>
-          <a:bodyPr wrap="square" lIns="0" tIns="0" rIns="0" bIns="0" rtlCol="0" anchor="t"/>
-          <a:lstStyle/>
-          <a:p>
-            <a:pPr algn="ctr" indent="0" marL="0">
-              <a:buNone/>
-            </a:pPr>
-            <a:r>
-              <a:rPr lang="en-US" sz="750" i="1" dirty="0">
-                <a:solidFill>
-                  <a:srgbClr val="94A3B8"/>
-                </a:solidFill>
-                <a:latin typeface="Calibri" pitchFamily="34" charset="0"/>
-                <a:ea typeface="Calibri" pitchFamily="34" charset="-122"/>
-                <a:cs typeface="Calibri" pitchFamily="34" charset="-120"/>
-              </a:rPr>
-              <a:t>/kt/</a:t>
-            </a:r>
-            <a:endParaRPr lang="en-US" sz="750" dirty="0"/>
+          <p:cNvPr id="49" name="Shape 47"/>
+          <p:cNvSpPr/>
+          <p:nvPr/>
+        </p:nvSpPr>
+        <p:spPr>
+          <a:xfrm>
+            <a:off x="6062472" y="4169664"/>
+            <a:ext cx="685800" cy="475488"/>
+          </a:xfrm>
+          <a:prstGeom prst="rect">
+            <a:avLst>
+              <a:gd name="adj" fmla="val 7692"/>
+            </a:avLst>
+          </a:prstGeom>
+          <a:solidFill>
+            <a:srgbClr val="FFFFFF"/>
+          </a:solidFill>
+          <a:ln w="12700">
+            <a:solidFill>
+              <a:srgbClr val="DB2777"/>
+            </a:solidFill>
+            <a:prstDash val="solid"/>
+          </a:ln>
+        </p:spPr>
+      </p:sp>
+      <p:sp>
+        <p:nvSpPr>
+          <p:cNvPr id="50" name="Text 48"/>
+          <p:cNvSpPr/>
+          <p:nvPr/>
+        </p:nvSpPr>
+        <p:spPr>
+          <a:xfrm>
+            <a:off x="6062472" y="4169664"/>
+            <a:ext cx="685800" cy="475488"/>
+          </a:xfrm>
+          <a:prstGeom prst="rect">
+            <a:avLst/>
+          </a:prstGeom>
+          <a:noFill/>
+          <a:ln/>
+        </p:spPr>
+        <p:txBody>
+          <a:bodyPr wrap="square" lIns="0" tIns="0" rIns="0" bIns="0" rtlCol="0" anchor="ctr"/>
+          <a:lstStyle/>
+          <a:p>
+            <a:pPr algn="ctr" indent="0" marL="0">
+              <a:buNone/>
+            </a:pPr>
+            <a:r>
+              <a:rPr lang="en-US" sz="900" b="1" dirty="0">
+                <a:solidFill>
+                  <a:srgbClr val="9D174D"/>
+                </a:solidFill>
+                <a:latin typeface="Trebuchet MS" pitchFamily="34" charset="0"/>
+                <a:ea typeface="Trebuchet MS" pitchFamily="34" charset="-122"/>
+                <a:cs typeface="Trebuchet MS" pitchFamily="34" charset="-120"/>
+              </a:rPr>
+              <a:t>t</a:t>
+            </a:r>
+            <a:endParaRPr lang="en-US" sz="900" dirty="0"/>
+          </a:p>
+        </p:txBody>
+      </p:sp>
+      <p:sp>
+        <p:nvSpPr>
+          <p:cNvPr id="51" name="Shape 49"/>
+          <p:cNvSpPr/>
+          <p:nvPr/>
+        </p:nvSpPr>
+        <p:spPr>
+          <a:xfrm>
+            <a:off x="6870192" y="4169664"/>
+            <a:ext cx="685800" cy="475488"/>
+          </a:xfrm>
+          <a:prstGeom prst="rect">
+            <a:avLst>
+              <a:gd name="adj" fmla="val 7692"/>
+            </a:avLst>
+          </a:prstGeom>
+          <a:solidFill>
+            <a:srgbClr val="FFFFFF"/>
+          </a:solidFill>
+          <a:ln w="12700">
+            <a:solidFill>
+              <a:srgbClr val="DB2777"/>
+            </a:solidFill>
+            <a:prstDash val="solid"/>
+          </a:ln>
+        </p:spPr>
+      </p:sp>
+      <p:sp>
+        <p:nvSpPr>
+          <p:cNvPr id="52" name="Text 50"/>
+          <p:cNvSpPr/>
+          <p:nvPr/>
+        </p:nvSpPr>
+        <p:spPr>
+          <a:xfrm>
+            <a:off x="6870192" y="4169664"/>
+            <a:ext cx="685800" cy="475488"/>
+          </a:xfrm>
+          <a:prstGeom prst="rect">
+            <a:avLst/>
+          </a:prstGeom>
+          <a:noFill/>
+          <a:ln/>
+        </p:spPr>
+        <p:txBody>
+          <a:bodyPr wrap="square" lIns="0" tIns="0" rIns="0" bIns="0" rtlCol="0" anchor="ctr"/>
+          <a:lstStyle/>
+          <a:p>
+            <a:pPr algn="ctr" indent="0" marL="0">
+              <a:buNone/>
+            </a:pPr>
+            <a:r>
+              <a:rPr lang="en-US" sz="900" b="1" dirty="0">
+                <a:solidFill>
+                  <a:srgbClr val="9D174D"/>
+                </a:solidFill>
+                <a:latin typeface="Trebuchet MS" pitchFamily="34" charset="0"/>
+                <a:ea typeface="Trebuchet MS" pitchFamily="34" charset="-122"/>
+                <a:cs typeface="Trebuchet MS" pitchFamily="34" charset="-120"/>
+              </a:rPr>
+              <a:t>i</a:t>
+            </a:r>
+            <a:endParaRPr lang="en-US" sz="900" dirty="0"/>
+          </a:p>
+        </p:txBody>
+      </p:sp>
+      <p:sp>
+        <p:nvSpPr>
+          <p:cNvPr id="53" name="Shape 51"/>
+          <p:cNvSpPr/>
+          <p:nvPr/>
+        </p:nvSpPr>
+        <p:spPr>
+          <a:xfrm>
+            <a:off x="7677912" y="4169664"/>
+            <a:ext cx="685800" cy="475488"/>
+          </a:xfrm>
+          <a:prstGeom prst="rect">
+            <a:avLst>
+              <a:gd name="adj" fmla="val 7692"/>
+            </a:avLst>
+          </a:prstGeom>
+          <a:solidFill>
+            <a:srgbClr val="FFFFFF"/>
+          </a:solidFill>
+          <a:ln w="12700">
+            <a:solidFill>
+              <a:srgbClr val="DB2777"/>
+            </a:solidFill>
+            <a:prstDash val="solid"/>
+          </a:ln>
+        </p:spPr>
+      </p:sp>
+      <p:sp>
+        <p:nvSpPr>
+          <p:cNvPr id="54" name="Text 52"/>
+          <p:cNvSpPr/>
+          <p:nvPr/>
+        </p:nvSpPr>
+        <p:spPr>
+          <a:xfrm>
+            <a:off x="7677912" y="4169664"/>
+            <a:ext cx="685800" cy="475488"/>
+          </a:xfrm>
+          <a:prstGeom prst="rect">
+            <a:avLst/>
+          </a:prstGeom>
+          <a:noFill/>
+          <a:ln/>
+        </p:spPr>
+        <p:txBody>
+          <a:bodyPr wrap="square" lIns="0" tIns="0" rIns="0" bIns="0" rtlCol="0" anchor="ctr"/>
+          <a:lstStyle/>
+          <a:p>
+            <a:pPr algn="ctr" indent="0" marL="0">
+              <a:buNone/>
+            </a:pPr>
+            <a:r>
+              <a:rPr lang="en-US" sz="900" b="1" dirty="0">
+                <a:solidFill>
+                  <a:srgbClr val="9D174D"/>
+                </a:solidFill>
+                <a:latin typeface="Trebuchet MS" pitchFamily="34" charset="0"/>
+                <a:ea typeface="Trebuchet MS" pitchFamily="34" charset="-122"/>
+                <a:cs typeface="Trebuchet MS" pitchFamily="34" charset="-120"/>
+              </a:rPr>
+              <a:t>ve</a:t>
+            </a:r>
+            <a:endParaRPr lang="en-US" sz="900" dirty="0"/>
           </a:p>
         </p:txBody>
       </p:sp>
@@ -35687,7 +36653,7 @@
                 <a:ea typeface="Trebuchet MS" pitchFamily="34" charset="-122"/>
                 <a:cs typeface="Trebuchet MS" pitchFamily="34" charset="-120"/>
               </a:rPr>
-              <a:t>inflection</a:t>
+              <a:t>deflected</a:t>
             </a:r>
             <a:endParaRPr lang="en-US" sz="1200" dirty="0"/>
           </a:p>
@@ -36875,7 +37841,7 @@
                 <a:ea typeface="Calibri" pitchFamily="34" charset="-122"/>
                 <a:cs typeface="Calibri" pitchFamily="34" charset="-120"/>
               </a:rPr>
-              <a:t>1.  The root 'flect' comes from Latin and means 'to bend or turn'.</a:t>
+              <a:t>1.  The word 'deflect' means to make something go faster in the same direction.</a:t>
             </a:r>
             <a:endParaRPr lang="en-US" sz="1300" dirty="0"/>
           </a:p>
@@ -36898,11 +37864,11 @@
             </a:avLst>
           </a:prstGeom>
           <a:solidFill>
-            <a:srgbClr val="DCFCE7"/>
-          </a:solidFill>
-          <a:ln w="12700">
-            <a:solidFill>
-              <a:srgbClr val="16A34A"/>
+            <a:srgbClr val="FEE2E2"/>
+          </a:solidFill>
+          <a:ln w="12700">
+            <a:solidFill>
+              <a:srgbClr val="DC2626"/>
             </a:solidFill>
             <a:prstDash val="solid"/>
           </a:ln>
@@ -36935,13 +37901,13 @@
             <a:r>
               <a:rPr lang="en-US" sz="1100" b="1" dirty="0">
                 <a:solidFill>
-                  <a:srgbClr val="16A34A"/>
+                  <a:srgbClr val="DC2626"/>
                 </a:solidFill>
                 <a:latin typeface="Trebuchet MS" pitchFamily="34" charset="0"/>
                 <a:ea typeface="Trebuchet MS" pitchFamily="34" charset="-122"/>
                 <a:cs typeface="Trebuchet MS" pitchFamily="34" charset="-120"/>
               </a:rPr>
-              <a:t>TRUE</a:t>
+              <a:t>FALSE</a:t>
             </a:r>
             <a:endParaRPr lang="en-US" sz="1100" dirty="0"/>
           </a:p>
@@ -37014,7 +37980,7 @@
                 <a:ea typeface="Calibri" pitchFamily="34" charset="-122"/>
                 <a:cs typeface="Calibri" pitchFamily="34" charset="-120"/>
               </a:rPr>
-              <a:t>2.  The word 'reflect' means to move something forward in a straight line.</a:t>
+              <a:t>2.  The root 'flect' comes from a Latin word meaning to bend or turn.</a:t>
             </a:r>
             <a:endParaRPr lang="en-US" sz="1300" dirty="0"/>
           </a:p>
@@ -37037,11 +38003,11 @@
             </a:avLst>
           </a:prstGeom>
           <a:solidFill>
-            <a:srgbClr val="FEE2E2"/>
-          </a:solidFill>
-          <a:ln w="12700">
-            <a:solidFill>
-              <a:srgbClr val="DC2626"/>
+            <a:srgbClr val="DCFCE7"/>
+          </a:solidFill>
+          <a:ln w="12700">
+            <a:solidFill>
+              <a:srgbClr val="16A34A"/>
             </a:solidFill>
             <a:prstDash val="solid"/>
           </a:ln>
@@ -37074,13 +38040,13 @@
             <a:r>
               <a:rPr lang="en-US" sz="1100" b="1" dirty="0">
                 <a:solidFill>
-                  <a:srgbClr val="DC2626"/>
+                  <a:srgbClr val="16A34A"/>
                 </a:solidFill>
                 <a:latin typeface="Trebuchet MS" pitchFamily="34" charset="0"/>
                 <a:ea typeface="Trebuchet MS" pitchFamily="34" charset="-122"/>
                 <a:cs typeface="Trebuchet MS" pitchFamily="34" charset="-120"/>
               </a:rPr>
-              <a:t>FALSE</a:t>
+              <a:t>TRUE</a:t>
             </a:r>
             <a:endParaRPr lang="en-US" sz="1100" dirty="0"/>
           </a:p>
@@ -37153,7 +38119,7 @@
                 <a:ea typeface="Calibri" pitchFamily="34" charset="-122"/>
                 <a:cs typeface="Calibri" pitchFamily="34" charset="-120"/>
               </a:rPr>
-              <a:t>3.  A reflective surface is one that bounces light back towards you.</a:t>
+              <a:t>3.  A mirror reflects light because the surface bends the light back toward you.</a:t>
             </a:r>
             <a:endParaRPr lang="en-US" sz="1300" dirty="0"/>
           </a:p>
@@ -37292,7 +38258,7 @@
                 <a:ea typeface="Calibri" pitchFamily="34" charset="-122"/>
                 <a:cs typeface="Calibri" pitchFamily="34" charset="-120"/>
               </a:rPr>
-              <a:t>4.  The prefix 're' in 'reflect' means 'back' or 'again'.</a:t>
+              <a:t>4.  The root 'flect' originally came from a Greek word.</a:t>
             </a:r>
             <a:endParaRPr lang="en-US" sz="1300" dirty="0"/>
           </a:p>
@@ -37315,11 +38281,11 @@
             </a:avLst>
           </a:prstGeom>
           <a:solidFill>
-            <a:srgbClr val="DCFCE7"/>
-          </a:solidFill>
-          <a:ln w="12700">
-            <a:solidFill>
-              <a:srgbClr val="16A34A"/>
+            <a:srgbClr val="FEE2E2"/>
+          </a:solidFill>
+          <a:ln w="12700">
+            <a:solidFill>
+              <a:srgbClr val="DC2626"/>
             </a:solidFill>
             <a:prstDash val="solid"/>
           </a:ln>
@@ -37352,13 +38318,13 @@
             <a:r>
               <a:rPr lang="en-US" sz="1100" b="1" dirty="0">
                 <a:solidFill>
-                  <a:srgbClr val="16A34A"/>
+                  <a:srgbClr val="DC2626"/>
                 </a:solidFill>
                 <a:latin typeface="Trebuchet MS" pitchFamily="34" charset="0"/>
                 <a:ea typeface="Trebuchet MS" pitchFamily="34" charset="-122"/>
                 <a:cs typeface="Trebuchet MS" pitchFamily="34" charset="-120"/>
               </a:rPr>
-              <a:t>TRUE</a:t>
+              <a:t>FALSE</a:t>
             </a:r>
             <a:endParaRPr lang="en-US" sz="1100" dirty="0"/>
           </a:p>
@@ -37431,7 +38397,7 @@
                 <a:ea typeface="Calibri" pitchFamily="34" charset="-122"/>
                 <a:cs typeface="Calibri" pitchFamily="34" charset="-120"/>
               </a:rPr>
-              <a:t>5.  The root 'flect' is found in the word 'flexible' with the same spelling.</a:t>
+              <a:t>5.  The word 'reflect' contains the root 'flect'.</a:t>
             </a:r>
             <a:endParaRPr lang="en-US" sz="1300" dirty="0"/>
           </a:p>
@@ -37454,11 +38420,11 @@
             </a:avLst>
           </a:prstGeom>
           <a:solidFill>
-            <a:srgbClr val="FEE2E2"/>
-          </a:solidFill>
-          <a:ln w="12700">
-            <a:solidFill>
-              <a:srgbClr val="DC2626"/>
+            <a:srgbClr val="DCFCE7"/>
+          </a:solidFill>
+          <a:ln w="12700">
+            <a:solidFill>
+              <a:srgbClr val="16A34A"/>
             </a:solidFill>
             <a:prstDash val="solid"/>
           </a:ln>
@@ -37491,13 +38457,13 @@
             <a:r>
               <a:rPr lang="en-US" sz="1100" b="1" dirty="0">
                 <a:solidFill>
-                  <a:srgbClr val="DC2626"/>
+                  <a:srgbClr val="16A34A"/>
                 </a:solidFill>
                 <a:latin typeface="Trebuchet MS" pitchFamily="34" charset="0"/>
                 <a:ea typeface="Trebuchet MS" pitchFamily="34" charset="-122"/>
                 <a:cs typeface="Trebuchet MS" pitchFamily="34" charset="-120"/>
               </a:rPr>
-              <a:t>FALSE</a:t>
+              <a:t>TRUE</a:t>
             </a:r>
             <a:endParaRPr lang="en-US" sz="1100" dirty="0"/>
           </a:p>
@@ -40710,7 +41676,7 @@
                 <a:ea typeface="Calibri" pitchFamily="34" charset="-122"/>
                 <a:cs typeface="Calibri" pitchFamily="34" charset="-120"/>
               </a:rPr>
-              <a:t>When light, heat, or sound bounces back off a surface, like seeing your face in a mirror.</a:t>
+              <a:t>When light or sound bounces back off a surface, or when you think carefully about something.</a:t>
             </a:r>
             <a:endParaRPr lang="en-US" sz="1200" dirty="0"/>
           </a:p>
@@ -40849,7 +41815,7 @@
                 <a:ea typeface="Calibri" pitchFamily="34" charset="-122"/>
                 <a:cs typeface="Calibri" pitchFamily="34" charset="-120"/>
               </a:rPr>
-              <a:t>The image you see bounced back from a mirror or still water, or a thought you have about something carefully.</a:t>
+              <a:t>The image you see bounced back from a mirror or still water.</a:t>
             </a:r>
             <a:endParaRPr lang="en-US" sz="1200" dirty="0"/>
           </a:p>
@@ -40988,7 +41954,7 @@
                 <a:ea typeface="Calibri" pitchFamily="34" charset="-122"/>
                 <a:cs typeface="Calibri" pitchFamily="34" charset="-120"/>
               </a:rPr>
-              <a:t>To change the tone or pitch of your voice when you speak.</a:t>
+              <a:t>To change the tone or pitch of your voice when speaking.</a:t>
             </a:r>
             <a:endParaRPr lang="en-US" sz="1200" dirty="0"/>
           </a:p>
@@ -41127,7 +42093,7 @@
                 <a:ea typeface="Calibri" pitchFamily="34" charset="-122"/>
                 <a:cs typeface="Calibri" pitchFamily="34" charset="-120"/>
               </a:rPr>
-              <a:t>The act of making an object change direction away from where it was heading.</a:t>
+              <a:t>The act of making something change direction or turn away.</a:t>
             </a:r>
             <a:endParaRPr lang="en-US" sz="1200" dirty="0"/>
           </a:p>
@@ -41266,7 +42232,7 @@
                 <a:ea typeface="Calibri" pitchFamily="34" charset="-122"/>
                 <a:cs typeface="Calibri" pitchFamily="34" charset="-120"/>
               </a:rPr>
-              <a:t>The action of bouncing light back or thinking carefully about something.</a:t>
+              <a:t>Currently bouncing light back, or thinking carefully about something right now.</a:t>
             </a:r>
             <a:endParaRPr lang="en-US" sz="1200" dirty="0"/>
           </a:p>
@@ -41405,7 +42371,7 @@
                 <a:ea typeface="Calibri" pitchFamily="34" charset="-122"/>
                 <a:cs typeface="Calibri" pitchFamily="34" charset="-120"/>
               </a:rPr>
-              <a:t>Something that bounces light back, or describes a person who thinks deeply and carefully about things.</a:t>
+              <a:t>Able to bounce back light, or describes someone who thinks deeply about things.</a:t>
             </a:r>
             <a:endParaRPr lang="en-US" sz="1200" dirty="0"/>
           </a:p>
@@ -41544,7 +42510,7 @@
                 <a:ea typeface="Calibri" pitchFamily="34" charset="-122"/>
                 <a:cs typeface="Calibri" pitchFamily="34" charset="-120"/>
               </a:rPr>
-              <a:t>To make something change direction by hitting or touching it, like a goalkeeper deflecting a ball away from the goal.</a:t>
+              <a:t>To make something change direction by hitting or pushing it away.</a:t>
             </a:r>
             <a:endParaRPr lang="en-US" sz="1200" dirty="0"/>
           </a:p>
@@ -42039,7 +43005,7 @@
                 <a:ea typeface="Calibri" pitchFamily="34" charset="-122"/>
                 <a:cs typeface="Calibri" pitchFamily="34" charset="-120"/>
               </a:rPr>
-              <a:t>The still lake could reflect the mountains perfectly, creating a beautiful mirror image on the water.</a:t>
+              <a:t>The calm lake could reflect the mountains so clearly that it looked like a painting.</a:t>
             </a:r>
             <a:endParaRPr lang="en-US" sz="1500" dirty="0"/>
           </a:p>
@@ -42203,7 +43169,7 @@
                 <a:ea typeface="Calibri" pitchFamily="34" charset="-122"/>
                 <a:cs typeface="Calibri" pitchFamily="34" charset="-120"/>
               </a:rPr>
-              <a:t>The goalkeeper managed to deflect the ball away from the goal at the very last second.</a:t>
+              <a:t>The goalkeeper managed to deflect the ball away from the goal at the last second.</a:t>
             </a:r>
             <a:endParaRPr lang="en-US" sz="1500" dirty="0"/>
           </a:p>
@@ -42367,7 +43333,7 @@
                 <a:ea typeface="Calibri" pitchFamily="34" charset="-122"/>
                 <a:cs typeface="Calibri" pitchFamily="34" charset="-120"/>
               </a:rPr>
-              <a:t>After the camp, the teacher asked students to reflect on what they had learned and write about it in their journals.</a:t>
+              <a:t>After the test, the teacher asked students to reflect on which questions they found most difficult.</a:t>
             </a:r>
             <a:endParaRPr lang="en-US" sz="1500" dirty="0"/>
           </a:p>
